--- a/Storyboarding/NewLectures/08b_Continuity_The_Cut.pptx
+++ b/Storyboarding/NewLectures/08b_Continuity_The_Cut.pptx
@@ -540,7 +540,7 @@
                 <a:ea typeface="+mn-ea"/>
                 <a:cs typeface="+mn-cs"/>
               </a:rPr>
-              <a:t>This is the second half of continuity. The first half was the rules - the line, screen direction, the three matches - and it ran before City Park because City Park is graded on it.</a:t>
+              <a:t>This is the second half of continuity. The first half was the rules: the line, screen direction, the three matches. It ran before City Park because City Park is graded on it.</a:t>
             </a:r>
           </a:p>
           <a:p>
@@ -1130,7 +1130,7 @@
                 <a:ea typeface="+mn-ea"/>
                 <a:cs typeface="+mn-cs"/>
               </a:rPr>
-              <a:t>It manipulates time and space simultaneously, and it is the standard way to build suspense - the bomb ticking, the hero driving, the bomb, the hero.</a:t>
+              <a:t>It manipulates time and space simultaneously, and it is the standard way to build suspense: the bomb ticking, the hero driving, the bomb, the hero.</a:t>
             </a:r>
           </a:p>
           <a:p/>
@@ -1240,7 +1240,7 @@
                 <a:ea typeface="+mn-ea"/>
                 <a:cs typeface="+mn-cs"/>
               </a:rPr>
-              <a:t>Six minutes, and it moves fast.</a:t>
+              <a:t>Six minutes or so, and it moves fast.</a:t>
             </a:r>
           </a:p>
           <a:p/>
@@ -1270,7 +1270,7 @@
                 <a:ea typeface="+mn-ea"/>
                 <a:cs typeface="+mn-cs"/>
               </a:rPr>
-              <a:t>Say: neither sequence would work alone. A baptism is not dramatic. Five murders is just violence. The meaning is manufactured entirely by the intercutting - and not one shot had to be redrawn to make it.</a:t>
+              <a:t>Say: neither sequence would work alone. A baptism is not dramatic. Five murders is just violence. The meaning is manufactured entirely by the intercutting, and not one shot had to be redrawn to make it.</a:t>
             </a:r>
           </a:p>
           <a:p/>
@@ -1447,7 +1447,7 @@
                 <a:ea typeface="+mn-ea"/>
                 <a:cs typeface="+mn-cs"/>
               </a:rPr>
-              <a:t>Same place a second later, or the other side of the world a year later - the transition is how they know which.</a:t>
+              <a:t>Same place a second later, or the other side of the world a year later, the transition is how they know which.</a:t>
             </a:r>
           </a:p>
           <a:p>
@@ -1659,7 +1659,7 @@
                 <a:ea typeface="+mn-ea"/>
                 <a:cs typeface="+mn-cs"/>
               </a:rPr>
-              <a:t>Conventionally it signals a lapse of time or a change of location - the limousine pulls away, the shot dissolves, we are somewhere else and later.</a:t>
+              <a:t>Conventionally it signals a lapse of time or a change of location: the limousine pulls away, the shot dissolves, we are somewhere else and later.</a:t>
             </a:r>
           </a:p>
           <a:p>
@@ -1821,7 +1821,7 @@
                 <a:ea typeface="+mn-ea"/>
                 <a:cs typeface="+mn-cs"/>
               </a:rPr>
-              <a:t>Over ninety per cent of all transitions in film, and the audience does not notice a single one.</a:t>
+              <a:t>Over ninety percent of all transitions in film, and the audience does not notice a single one.</a:t>
             </a:r>
           </a:p>
           <a:p>
@@ -2208,7 +2208,7 @@
                 <a:ea typeface="+mn-ea"/>
                 <a:cs typeface="+mn-cs"/>
               </a:rPr>
-              <a:t>Popular in the 1930s and 40s, out of fashion after the war, and resurrected almost single-handedly by Star Wars - which used them deliberately to evoke the serials Lucas grew up on.</a:t>
+              <a:t>Popular in the 1930s and 40s, out of fashion after the war, and resurrected almost single-handedly by Star Wars, which used them deliberately to evoke the serials Lucas grew up on.</a:t>
             </a:r>
           </a:p>
           <a:p>
@@ -2508,7 +2508,7 @@
                 <a:ea typeface="+mn-ea"/>
                 <a:cs typeface="+mn-cs"/>
               </a:rPr>
-              <a:t>Say: this is the single most important idea in editing theory, and it is genuinely strange when you think about it. Meaning appears in a gap. Nobody drew it and nobody photographed it - the audience manufactured it between two frames.</a:t>
+              <a:t>Say: this is one of the strangest and most important ideas in editing theory. Meaning appears in a gap. Nobody drew it and nobody photographed it, the audience manufactured it between two frames.</a:t>
             </a:r>
           </a:p>
         </p:txBody>
@@ -2648,7 +2648,7 @@
                 <a:ea typeface="+mn-ea"/>
                 <a:cs typeface="+mn-cs"/>
               </a:rPr>
-              <a:t>Say: this is the closure slide from your composition lecture, operating across a cut instead of inside a frame. The brain completes what you leave out - that is what made crude boards legible, and it is what makes montage work. Same principle, different scale.</a:t>
+              <a:t>Say: this is the closure slide from your composition lecture, operating across a cut instead of inside a frame. The brain completes what you leave out: that is what made crude boards legible, and it is what makes montage work. Same principle, different scale.</a:t>
             </a:r>
           </a:p>
         </p:txBody>
@@ -2743,7 +2743,7 @@
                 <a:ea typeface="+mn-ea"/>
                 <a:cs typeface="+mn-cs"/>
               </a:rPr>
-              <a:t>Note the corrections on this slide. The original notes read "Sergi eisenstein ablnd Dziga Vertov", and both the slide and the notes attributed Battleship Potemkin to "Einstein". It is Eisenstein - Sergei Eisenstein - and it is fixed in both places.</a:t>
+              <a:t>Note the corrections on this slide. The original notes read "Sergi eisenstein ablnd Dziga Vertov", and both the slide and the notes attributed Battleship Potemkin to "Einstein". It is Eisenstein (Sergei Eisenstein), and it is fixed in both places.</a:t>
             </a:r>
           </a:p>
           <a:p/>
@@ -2758,7 +2758,7 @@
                 <a:ea typeface="+mn-ea"/>
                 <a:cs typeface="+mn-cs"/>
               </a:rPr>
-              <a:t>Eisenstein theorised montage as collision: two shots striking each other to produce an idea neither contains.</a:t>
+              <a:t>Eisenstein theorized montage as collision: two shots striking each other to produce an idea neither contains.</a:t>
             </a:r>
           </a:p>
           <a:p/>
@@ -2900,7 +2900,7 @@
                 <a:ea typeface="+mn-ea"/>
                 <a:cs typeface="+mn-cs"/>
               </a:rPr>
-              <a:t>Close on the original summary, which is a good one, and then set the exercise.</a:t>
+              <a:t>Close on the original summary, and then set the exercise.</a:t>
             </a:r>
           </a:p>
           <a:p>
@@ -2950,7 +2950,7 @@
                 <a:ea typeface="+mn-ea"/>
                 <a:cs typeface="+mn-cs"/>
               </a:rPr>
-              <a:t>Exercise: take three panels from your animatic and change only the transition between them. Cut, then dissolve, then a hold with a fade. Nothing else changes - same panels, same order.</a:t>
+              <a:t>Exercise: take three panels from your animatic and change only the transition between them. Cut, then dissolve, then a hold with a fade. Nothing else changes: same panels, same order.</a:t>
             </a:r>
           </a:p>
           <a:p>
@@ -3000,7 +3000,7 @@
                 <a:ea typeface="+mn-ea"/>
                 <a:cs typeface="+mn-cs"/>
               </a:rPr>
-              <a:t>Say: report back on what changed. Not what looked nicer - what the sequence appeared to mean. You will find that the transition alters the perceived time gap, and sometimes the emotional weight, without a single frame of new artwork.</a:t>
+              <a:t>Say: report back on what changed. Not what looked nicer: what the sequence appeared to mean. You will find that the transition alters the perceived time gap, and sometimes the emotional weight, without a single frame of new artwork.</a:t>
             </a:r>
           </a:p>
           <a:p>
@@ -3132,7 +3132,7 @@
           <a:p>
             <a:r>
               <a:rPr lang="en-US" dirty="0"/>
-              <a:t>A music video is usually assembled to the song - the cutting rhythm is dictated by the track, and the shots relate to a theme rather than to a continuous action.</a:t>
+              <a:t>A music video is usually assembled to the song: the cutting rhythm is dictated by the track, and the shots relate to a theme rather than to a continuous action.</a:t>
             </a:r>
           </a:p>
           <a:p/>
@@ -3193,7 +3193,7 @@
           <a:p>
             <a:r>
               <a:rPr lang="en-US" dirty="0"/>
-              <a:t>This section is new, and it exists because the composition lecture explicitly promises it - Deck 05 says "your continuity lecture will show you this again."</a:t>
+              <a:t>This section is new, and it exists because the composition lecture explicitly promises it: Deck 05 says "your continuity lecture will show you this again."</a:t>
             </a:r>
           </a:p>
           <a:p/>
@@ -3207,7 +3207,7 @@
           <a:p>
             <a:r>
               <a:rPr lang="en-US" dirty="0"/>
-              <a:t>2001 again - third time this term.</a:t>
+              <a:t>2001 again, third time this term.</a:t>
             </a:r>
           </a:p>
           <a:p/>
@@ -3268,7 +3268,7 @@
           <a:p>
             <a:r>
               <a:rPr lang="en-US" dirty="0"/>
-              <a:t>A cut between two shots with near-identical composition does not read as a cut. It reads as a glitch - the audience senses something happened but cannot see what, which is exactly the jump-cut effect arriving by accident.</a:t>
+              <a:t>A cut between two shots with near-identical composition does not read as a cut. It reads as a glitch: the audience senses something happened but cannot see what, which is exactly the jump-cut effect arriving by accident.</a:t>
             </a:r>
           </a:p>
           <a:p/>
@@ -3343,7 +3343,7 @@
           <a:p>
             <a:r>
               <a:rPr lang="en-US" dirty="0"/>
-              <a:t>Say: both are legitimate. Matching position gives you smoothness. Deliberately displacing gives you a jolt - which is useful when you want one.</a:t>
+              <a:t>Say: both are legitimate. Matching position gives you smoothness. Deliberately displacing gives you a jolt, which is useful when you want one.</a:t>
             </a:r>
           </a:p>
           <a:p/>
@@ -3397,7 +3397,7 @@
           <a:p>
             <a:r>
               <a:rPr lang="en-US" dirty="0"/>
-              <a:t>Callback to the Hero's Journey return slide in Deck 01 - the binary sunset in Star Wars, the same framing with a different character standing in it.</a:t>
+              <a:t>Callback to the Hero's Journey return slide in Deck 01: the binary sunset in Star Wars, the same framing with a different character standing in it.</a:t>
             </a:r>
           </a:p>
           <a:p/>
@@ -3411,7 +3411,7 @@
           <a:p>
             <a:r>
               <a:rPr lang="en-US" dirty="0"/>
-              <a:t>Say: same frame, changed meaning. That is the whole trick, and it costs you nothing but planning - which is precisely why it has to be planned at the boarding stage. You cannot add an echo in the edit if you never shot the original.</a:t>
+              <a:t>Say: same frame, changed meaning. That is the whole trick, and it costs you nothing but planning, which is precisely why it has to be planned at the boarding stage. You cannot add an echo in the edit if you never shot the original.</a:t>
             </a:r>
           </a:p>
           <a:p/>
@@ -3515,7 +3515,7 @@
                 <a:ea typeface="+mn-ea"/>
                 <a:cs typeface="+mn-cs"/>
               </a:rPr>
-              <a:t>Say: none of that is an effect. It is structural, it is decided at the board, and the audience is not supposed to notice any of it. If a production achieves continuity, the manipulation of time and space is invisible - which is why editing is the least appreciated craft in film and one of the most decisive.</a:t>
+              <a:t>Say: none of that is an effect. It is structural, it is decided at the board, and the audience is not supposed to notice any of it. If a production achieves continuity, the manipulation of time and space is invisible, which is why editing is the least appreciated craft in film and one of the most decisive.</a:t>
             </a:r>
           </a:p>
         </p:txBody>
@@ -9245,7 +9245,1791 @@
 </p:sld>
 </file>
 
-<file path=ppt/slides/slide31.xml><?xml version="1.0" encoding="utf-8"?>
+<file path=ppt/slides/slide10.xml><?xml version="1.0" encoding="utf-8"?>
+<p:sld xmlns:a="http://schemas.openxmlformats.org/drawingml/2006/main" xmlns:r="http://schemas.openxmlformats.org/officeDocument/2006/relationships" xmlns:p="http://schemas.openxmlformats.org/presentationml/2006/main">
+  <p:cSld>
+    <p:spTree>
+      <p:nvGrpSpPr>
+        <p:cNvPr id="1" name=""/>
+        <p:cNvGrpSpPr/>
+        <p:nvPr/>
+      </p:nvGrpSpPr>
+      <p:grpSpPr>
+        <a:xfrm>
+          <a:off x="0" y="0"/>
+          <a:ext cx="0" cy="0"/>
+          <a:chOff x="0" y="0"/>
+          <a:chExt cx="0" cy="0"/>
+        </a:xfrm>
+      </p:grpSpPr>
+      <p:sp>
+        <p:nvSpPr>
+          <p:cNvPr id="2" name="Title 1">
+            <a:extLst>
+              <a:ext uri="{FF2B5EF4-FFF2-40B4-BE49-F238E27FC236}">
+                <a16:creationId xmlns:a16="http://schemas.microsoft.com/office/drawing/2014/main" id="{45D11BE3-4440-4C5E-8091-47DC498FABF9}"/>
+              </a:ext>
+            </a:extLst>
+          </p:cNvPr>
+          <p:cNvSpPr>
+            <a:spLocks noGrp="1"/>
+          </p:cNvSpPr>
+          <p:nvPr>
+            <p:ph type="title"/>
+          </p:nvPr>
+        </p:nvSpPr>
+        <p:spPr/>
+        <p:txBody>
+          <a:bodyPr/>
+          <a:lstStyle/>
+          <a:p>
+            <a:r>
+              <a:rPr lang="en-US" dirty="0"/>
+              <a:t>Dissolve</a:t>
+            </a:r>
+          </a:p>
+        </p:txBody>
+      </p:sp>
+      <p:sp>
+        <p:nvSpPr>
+          <p:cNvPr id="3" name="Content Placeholder 2">
+            <a:extLst>
+              <a:ext uri="{FF2B5EF4-FFF2-40B4-BE49-F238E27FC236}">
+                <a16:creationId xmlns:a16="http://schemas.microsoft.com/office/drawing/2014/main" id="{B733F94E-A8B6-44A1-87CC-ECF44144CF16}"/>
+              </a:ext>
+            </a:extLst>
+          </p:cNvPr>
+          <p:cNvSpPr>
+            <a:spLocks noGrp="1"/>
+          </p:cNvSpPr>
+          <p:nvPr>
+            <p:ph idx="1"/>
+          </p:nvPr>
+        </p:nvSpPr>
+        <p:spPr/>
+        <p:txBody>
+          <a:bodyPr/>
+          <a:lstStyle/>
+          <a:p>
+            <a:r>
+              <a:rPr lang="en-US" dirty="0"/>
+              <a:t>Basically, when a piece of film strip was </a:t>
+            </a:r>
+            <a:r>
+              <a:rPr lang="en-US" b="1" dirty="0"/>
+              <a:t>superimposed</a:t>
+            </a:r>
+            <a:r>
+              <a:rPr lang="en-US" dirty="0"/>
+              <a:t> onto another, creating an </a:t>
+            </a:r>
+            <a:r>
+              <a:rPr lang="en-US" b="1" dirty="0"/>
+              <a:t>overlapping</a:t>
+            </a:r>
+            <a:r>
+              <a:rPr lang="en-US" dirty="0"/>
+              <a:t> image.</a:t>
+            </a:r>
+          </a:p>
+          <a:p>
+            <a:r>
+              <a:rPr lang="en-US" dirty="0"/>
+              <a:t>Can be any length, and are usually employed to show a time lapse or location change.</a:t>
+            </a:r>
+          </a:p>
+        </p:txBody>
+      </p:sp>
+    </p:spTree>
+    <p:extLst>
+      <p:ext uri="{BB962C8B-B14F-4D97-AF65-F5344CB8AC3E}">
+        <p14:creationId xmlns:p14="http://schemas.microsoft.com/office/powerpoint/2010/main" val="2321641938"/>
+      </p:ext>
+    </p:extLst>
+  </p:cSld>
+  <p:clrMapOvr>
+    <a:masterClrMapping/>
+  </p:clrMapOvr>
+</p:sld>
+</file>
+
+<file path=ppt/slides/slide11.xml><?xml version="1.0" encoding="utf-8"?>
+<p:sld xmlns:a="http://schemas.openxmlformats.org/drawingml/2006/main" xmlns:r="http://schemas.openxmlformats.org/officeDocument/2006/relationships" xmlns:p="http://schemas.openxmlformats.org/presentationml/2006/main">
+  <p:cSld>
+    <p:spTree>
+      <p:nvGrpSpPr>
+        <p:cNvPr id="1" name=""/>
+        <p:cNvGrpSpPr/>
+        <p:nvPr/>
+      </p:nvGrpSpPr>
+      <p:grpSpPr>
+        <a:xfrm>
+          <a:off x="0" y="0"/>
+          <a:ext cx="0" cy="0"/>
+          <a:chOff x="0" y="0"/>
+          <a:chExt cx="0" cy="0"/>
+        </a:xfrm>
+      </p:grpSpPr>
+      <p:sp>
+        <p:nvSpPr>
+          <p:cNvPr id="2" name="Title 1">
+            <a:extLst>
+              <a:ext uri="{FF2B5EF4-FFF2-40B4-BE49-F238E27FC236}">
+                <a16:creationId xmlns:a16="http://schemas.microsoft.com/office/drawing/2014/main" id="{EF2FD256-FA49-45AF-8632-9EE3112CAE1E}"/>
+              </a:ext>
+            </a:extLst>
+          </p:cNvPr>
+          <p:cNvSpPr>
+            <a:spLocks noGrp="1"/>
+          </p:cNvSpPr>
+          <p:nvPr>
+            <p:ph type="title"/>
+          </p:nvPr>
+        </p:nvSpPr>
+        <p:spPr/>
+        <p:txBody>
+          <a:bodyPr/>
+          <a:lstStyle/>
+          <a:p>
+            <a:r>
+              <a:rPr lang="en-US" dirty="0"/>
+              <a:t>Fade</a:t>
+            </a:r>
+          </a:p>
+        </p:txBody>
+      </p:sp>
+      <p:sp>
+        <p:nvSpPr>
+          <p:cNvPr id="3" name="Content Placeholder 2">
+            <a:extLst>
+              <a:ext uri="{FF2B5EF4-FFF2-40B4-BE49-F238E27FC236}">
+                <a16:creationId xmlns:a16="http://schemas.microsoft.com/office/drawing/2014/main" id="{E1E88A0E-251C-440E-870C-28AFF45B85ED}"/>
+              </a:ext>
+            </a:extLst>
+          </p:cNvPr>
+          <p:cNvSpPr>
+            <a:spLocks noGrp="1"/>
+          </p:cNvSpPr>
+          <p:nvPr>
+            <p:ph idx="1"/>
+          </p:nvPr>
+        </p:nvSpPr>
+        <p:spPr/>
+        <p:txBody>
+          <a:bodyPr>
+            <a:normAutofit lnSpcReduction="10000"/>
+          </a:bodyPr>
+          <a:lstStyle/>
+          <a:p>
+            <a:r>
+              <a:rPr lang="en-US" dirty="0">
+                <a:solidFill>
+                  <a:schemeClr val="tx1"/>
+                </a:solidFill>
+              </a:rPr>
+              <a:t>Used to denote a </a:t>
+            </a:r>
+            <a:r>
+              <a:rPr lang="en-US" b="1" dirty="0">
+                <a:solidFill>
+                  <a:schemeClr val="tx1"/>
+                </a:solidFill>
+              </a:rPr>
+              <a:t>passage of time</a:t>
+            </a:r>
+            <a:r>
+              <a:rPr lang="en-US" dirty="0">
+                <a:solidFill>
+                  <a:schemeClr val="tx1"/>
+                </a:solidFill>
+              </a:rPr>
+              <a:t> and should not be used in the present tense. </a:t>
+            </a:r>
+          </a:p>
+          <a:p>
+            <a:r>
+              <a:rPr lang="en-US" dirty="0">
+                <a:solidFill>
+                  <a:schemeClr val="tx1"/>
+                </a:solidFill>
+              </a:rPr>
+              <a:t>Fades are usually very subtle as the screen fades in or out from black. (if it fades to white, it's often called a white out)</a:t>
+            </a:r>
+          </a:p>
+          <a:p>
+            <a:r>
+              <a:rPr lang="en-US" dirty="0">
+                <a:solidFill>
+                  <a:schemeClr val="tx1"/>
+                </a:solidFill>
+              </a:rPr>
+              <a:t>A </a:t>
+            </a:r>
+            <a:r>
+              <a:rPr lang="en-US" b="1" dirty="0">
+                <a:solidFill>
+                  <a:schemeClr val="tx1"/>
+                </a:solidFill>
+              </a:rPr>
+              <a:t>Fade-In</a:t>
+            </a:r>
+            <a:r>
+              <a:rPr lang="en-US" dirty="0">
+                <a:solidFill>
+                  <a:schemeClr val="tx1"/>
+                </a:solidFill>
+              </a:rPr>
+              <a:t> is used to ease the audience into a setting by starting in black, and gradually lightening up the setting to full brightness. </a:t>
+            </a:r>
+          </a:p>
+          <a:p>
+            <a:r>
+              <a:rPr lang="en-US" dirty="0">
+                <a:solidFill>
+                  <a:schemeClr val="tx1"/>
+                </a:solidFill>
+              </a:rPr>
+              <a:t>A </a:t>
+            </a:r>
+            <a:r>
+              <a:rPr lang="en-US" b="1" dirty="0">
+                <a:solidFill>
+                  <a:schemeClr val="tx1"/>
+                </a:solidFill>
+              </a:rPr>
+              <a:t>Fade Out</a:t>
+            </a:r>
+            <a:r>
+              <a:rPr lang="en-US" dirty="0">
+                <a:solidFill>
+                  <a:schemeClr val="tx1"/>
+                </a:solidFill>
+              </a:rPr>
+              <a:t> is usually the last shot of a scene that gradually disappears into darkness.</a:t>
+            </a:r>
+          </a:p>
+          <a:p>
+            <a:endParaRPr lang="en-US" dirty="0"/>
+          </a:p>
+        </p:txBody>
+      </p:sp>
+    </p:spTree>
+    <p:extLst>
+      <p:ext uri="{BB962C8B-B14F-4D97-AF65-F5344CB8AC3E}">
+        <p14:creationId xmlns:p14="http://schemas.microsoft.com/office/powerpoint/2010/main" val="70159564"/>
+      </p:ext>
+    </p:extLst>
+  </p:cSld>
+  <p:clrMapOvr>
+    <a:masterClrMapping/>
+  </p:clrMapOvr>
+</p:sld>
+</file>
+
+<file path=ppt/slides/slide12.xml><?xml version="1.0" encoding="utf-8"?>
+<p:sld xmlns:a="http://schemas.openxmlformats.org/drawingml/2006/main" xmlns:r="http://schemas.openxmlformats.org/officeDocument/2006/relationships" xmlns:p="http://schemas.openxmlformats.org/presentationml/2006/main">
+  <p:cSld>
+    <p:spTree>
+      <p:nvGrpSpPr>
+        <p:cNvPr id="1" name=""/>
+        <p:cNvGrpSpPr/>
+        <p:nvPr/>
+      </p:nvGrpSpPr>
+      <p:grpSpPr>
+        <a:xfrm>
+          <a:off x="0" y="0"/>
+          <a:ext cx="0" cy="0"/>
+          <a:chOff x="0" y="0"/>
+          <a:chExt cx="0" cy="0"/>
+        </a:xfrm>
+      </p:grpSpPr>
+      <p:sp>
+        <p:nvSpPr>
+          <p:cNvPr id="2" name="Title 1">
+            <a:extLst>
+              <a:ext uri="{FF2B5EF4-FFF2-40B4-BE49-F238E27FC236}">
+                <a16:creationId xmlns:a16="http://schemas.microsoft.com/office/drawing/2014/main" id="{E0F115C0-0F99-4855-A2CC-12541815381F}"/>
+              </a:ext>
+            </a:extLst>
+          </p:cNvPr>
+          <p:cNvSpPr>
+            <a:spLocks noGrp="1"/>
+          </p:cNvSpPr>
+          <p:nvPr>
+            <p:ph type="title"/>
+          </p:nvPr>
+        </p:nvSpPr>
+        <p:spPr/>
+        <p:txBody>
+          <a:bodyPr/>
+          <a:lstStyle/>
+          <a:p>
+            <a:r>
+              <a:rPr lang="en-US" dirty="0"/>
+              <a:t>Wipe</a:t>
+            </a:r>
+          </a:p>
+        </p:txBody>
+      </p:sp>
+      <p:sp>
+        <p:nvSpPr>
+          <p:cNvPr id="3" name="Content Placeholder 2">
+            <a:extLst>
+              <a:ext uri="{FF2B5EF4-FFF2-40B4-BE49-F238E27FC236}">
+                <a16:creationId xmlns:a16="http://schemas.microsoft.com/office/drawing/2014/main" id="{4F0E944D-3A8E-486C-924A-7F2F19447042}"/>
+              </a:ext>
+            </a:extLst>
+          </p:cNvPr>
+          <p:cNvSpPr>
+            <a:spLocks noGrp="1"/>
+          </p:cNvSpPr>
+          <p:nvPr>
+            <p:ph idx="1"/>
+          </p:nvPr>
+        </p:nvSpPr>
+        <p:spPr/>
+        <p:txBody>
+          <a:bodyPr/>
+          <a:lstStyle/>
+          <a:p>
+            <a:endParaRPr lang="en-US" dirty="0"/>
+          </a:p>
+          <a:p>
+            <a:r>
+              <a:rPr lang="en-US" dirty="0">
+                <a:solidFill>
+                  <a:schemeClr val="tx1"/>
+                </a:solidFill>
+              </a:rPr>
+              <a:t>Wipes function the same way as the cut, transitioning from one shot to the next, but here it pushes one image off the screen with another image. </a:t>
+            </a:r>
+          </a:p>
+          <a:p>
+            <a:r>
+              <a:rPr lang="en-US" dirty="0">
+                <a:solidFill>
+                  <a:schemeClr val="tx1"/>
+                </a:solidFill>
+              </a:rPr>
+              <a:t>This showy technique was quite popular during the 1930s and 40s, but went out of fashion shortly after World War II. </a:t>
+            </a:r>
+          </a:p>
+          <a:p>
+            <a:r>
+              <a:rPr lang="en-US" dirty="0">
+                <a:solidFill>
+                  <a:schemeClr val="tx1"/>
+                </a:solidFill>
+              </a:rPr>
+              <a:t>The wipe made a resurgence in the 1970s with the release of Star Wars, and can be seen in a handful of films today. </a:t>
+            </a:r>
+          </a:p>
+          <a:p>
+            <a:endParaRPr lang="en-US" dirty="0"/>
+          </a:p>
+          <a:p>
+            <a:endParaRPr lang="en-US" dirty="0"/>
+          </a:p>
+          <a:p>
+            <a:endParaRPr lang="en-US" dirty="0"/>
+          </a:p>
+        </p:txBody>
+      </p:sp>
+    </p:spTree>
+    <p:extLst>
+      <p:ext uri="{BB962C8B-B14F-4D97-AF65-F5344CB8AC3E}">
+        <p14:creationId xmlns:p14="http://schemas.microsoft.com/office/powerpoint/2010/main" val="525080044"/>
+      </p:ext>
+    </p:extLst>
+  </p:cSld>
+  <p:clrMapOvr>
+    <a:masterClrMapping/>
+  </p:clrMapOvr>
+</p:sld>
+</file>
+
+<file path=ppt/slides/slide13.xml><?xml version="1.0" encoding="utf-8"?>
+<p:sld xmlns:a="http://schemas.openxmlformats.org/drawingml/2006/main" xmlns:r="http://schemas.openxmlformats.org/officeDocument/2006/relationships" xmlns:p="http://schemas.openxmlformats.org/presentationml/2006/main">
+  <p:cSld>
+    <p:spTree>
+      <p:nvGrpSpPr>
+        <p:cNvPr id="1" name=""/>
+        <p:cNvGrpSpPr/>
+        <p:nvPr/>
+      </p:nvGrpSpPr>
+      <p:grpSpPr>
+        <a:xfrm>
+          <a:off x="0" y="0"/>
+          <a:ext cx="0" cy="0"/>
+          <a:chOff x="0" y="0"/>
+          <a:chExt cx="0" cy="0"/>
+        </a:xfrm>
+      </p:grpSpPr>
+      <p:sp>
+        <p:nvSpPr>
+          <p:cNvPr id="2" name="Title 1">
+            <a:extLst>
+              <a:ext uri="{FF2B5EF4-FFF2-40B4-BE49-F238E27FC236}">
+                <a16:creationId xmlns:a16="http://schemas.microsoft.com/office/drawing/2014/main" id="{D0986C61-E2FD-44AF-B478-6BF0F152AF52}"/>
+              </a:ext>
+            </a:extLst>
+          </p:cNvPr>
+          <p:cNvSpPr>
+            <a:spLocks noGrp="1"/>
+          </p:cNvSpPr>
+          <p:nvPr>
+            <p:ph type="title"/>
+          </p:nvPr>
+        </p:nvSpPr>
+        <p:spPr/>
+        <p:txBody>
+          <a:bodyPr/>
+          <a:lstStyle/>
+          <a:p>
+            <a:r>
+              <a:rPr lang="en-US" dirty="0"/>
+              <a:t>Jump Cut</a:t>
+            </a:r>
+          </a:p>
+        </p:txBody>
+      </p:sp>
+      <p:sp>
+        <p:nvSpPr>
+          <p:cNvPr id="3" name="Content Placeholder 2">
+            <a:extLst>
+              <a:ext uri="{FF2B5EF4-FFF2-40B4-BE49-F238E27FC236}">
+                <a16:creationId xmlns:a16="http://schemas.microsoft.com/office/drawing/2014/main" id="{91F6BC23-094B-423C-900C-9AE9219D40BA}"/>
+              </a:ext>
+            </a:extLst>
+          </p:cNvPr>
+          <p:cNvSpPr>
+            <a:spLocks noGrp="1"/>
+          </p:cNvSpPr>
+          <p:nvPr>
+            <p:ph idx="1"/>
+          </p:nvPr>
+        </p:nvSpPr>
+        <p:spPr/>
+        <p:txBody>
+          <a:bodyPr>
+            <a:normAutofit/>
+          </a:bodyPr>
+          <a:lstStyle/>
+          <a:p>
+            <a:r>
+              <a:rPr lang="en-US" dirty="0">
+                <a:solidFill>
+                  <a:schemeClr val="tx1"/>
+                </a:solidFill>
+              </a:rPr>
+              <a:t>Jump cuts are the opposite of continuity shots, using abrupt changes in movement to disrupt the illusion of a continuous flow of action .  </a:t>
+            </a:r>
+          </a:p>
+          <a:p>
+            <a:r>
+              <a:rPr lang="en-US" dirty="0">
+                <a:solidFill>
+                  <a:schemeClr val="tx1"/>
+                </a:solidFill>
+              </a:rPr>
+              <a:t>A jump can be achieved between shots by maintaining the background and abruptly changing a character's position.  </a:t>
+            </a:r>
+          </a:p>
+          <a:p>
+            <a:r>
+              <a:rPr lang="en-US" dirty="0">
+                <a:solidFill>
+                  <a:schemeClr val="tx1"/>
+                </a:solidFill>
+              </a:rPr>
+              <a:t>Jump cuts are also achieved when character framing is the same from one shot to the next, but the camera has moved its position. </a:t>
+            </a:r>
+          </a:p>
+          <a:p>
+            <a:endParaRPr lang="en-US" dirty="0"/>
+          </a:p>
+          <a:p>
+            <a:endParaRPr lang="en-US" dirty="0"/>
+          </a:p>
+        </p:txBody>
+      </p:sp>
+    </p:spTree>
+    <p:extLst>
+      <p:ext uri="{BB962C8B-B14F-4D97-AF65-F5344CB8AC3E}">
+        <p14:creationId xmlns:p14="http://schemas.microsoft.com/office/powerpoint/2010/main" val="308922380"/>
+      </p:ext>
+    </p:extLst>
+  </p:cSld>
+  <p:clrMapOvr>
+    <a:masterClrMapping/>
+  </p:clrMapOvr>
+</p:sld>
+</file>
+
+<file path=ppt/slides/slide14.xml><?xml version="1.0" encoding="utf-8"?>
+<p:sld xmlns:a="http://schemas.openxmlformats.org/drawingml/2006/main" xmlns:r="http://schemas.openxmlformats.org/officeDocument/2006/relationships" xmlns:p="http://schemas.openxmlformats.org/presentationml/2006/main">
+  <p:cSld>
+    <p:spTree>
+      <p:nvGrpSpPr>
+        <p:cNvPr id="1" name=""/>
+        <p:cNvGrpSpPr/>
+        <p:nvPr/>
+      </p:nvGrpSpPr>
+      <p:grpSpPr>
+        <a:xfrm>
+          <a:off x="0" y="0"/>
+          <a:ext cx="0" cy="0"/>
+          <a:chOff x="0" y="0"/>
+          <a:chExt cx="0" cy="0"/>
+        </a:xfrm>
+      </p:grpSpPr>
+      <p:sp>
+        <p:nvSpPr>
+          <p:cNvPr id="2" name="Title 1">
+            <a:extLst>
+              <a:ext uri="{FF2B5EF4-FFF2-40B4-BE49-F238E27FC236}">
+                <a16:creationId xmlns:a16="http://schemas.microsoft.com/office/drawing/2014/main" id="{F76A21A0-BB46-4705-8F46-89738D9DBFDC}"/>
+              </a:ext>
+            </a:extLst>
+          </p:cNvPr>
+          <p:cNvSpPr>
+            <a:spLocks noGrp="1"/>
+          </p:cNvSpPr>
+          <p:nvPr>
+            <p:ph type="title"/>
+          </p:nvPr>
+        </p:nvSpPr>
+        <p:spPr/>
+        <p:txBody>
+          <a:bodyPr/>
+          <a:lstStyle/>
+          <a:p>
+            <a:r>
+              <a:rPr lang="en-US" dirty="0"/>
+              <a:t>Juxtaposition Creates Meaning</a:t>
+            </a:r>
+          </a:p>
+        </p:txBody>
+      </p:sp>
+      <p:sp>
+        <p:nvSpPr>
+          <p:cNvPr id="3" name="Content Placeholder 2">
+            <a:extLst>
+              <a:ext uri="{FF2B5EF4-FFF2-40B4-BE49-F238E27FC236}">
+                <a16:creationId xmlns:a16="http://schemas.microsoft.com/office/drawing/2014/main" id="{DEC16AA6-B58B-4D32-9CF5-6757FC0A83C0}"/>
+              </a:ext>
+            </a:extLst>
+          </p:cNvPr>
+          <p:cNvSpPr>
+            <a:spLocks noGrp="1"/>
+          </p:cNvSpPr>
+          <p:nvPr>
+            <p:ph idx="1"/>
+          </p:nvPr>
+        </p:nvSpPr>
+        <p:spPr/>
+        <p:txBody>
+          <a:bodyPr/>
+          <a:lstStyle/>
+          <a:p>
+            <a:r>
+              <a:rPr lang="en-US" dirty="0">
+                <a:solidFill>
+                  <a:schemeClr val="tx1"/>
+                </a:solidFill>
+              </a:rPr>
+              <a:t>Cinematic montage is a series of images that can be juxtaposed to create  meaning by evoking an emotional response. </a:t>
+            </a:r>
+          </a:p>
+          <a:p>
+            <a:r>
+              <a:rPr lang="en-US" dirty="0">
+                <a:solidFill>
+                  <a:schemeClr val="tx1"/>
+                </a:solidFill>
+              </a:rPr>
+              <a:t>The shots maintained information relating to a single idea or theme. Music videos are often assembled around the montage sequence of a band or singer.  </a:t>
+            </a:r>
+          </a:p>
+          <a:p>
+            <a:r>
+              <a:rPr lang="en-US" dirty="0">
+                <a:solidFill>
+                  <a:schemeClr val="tx1"/>
+                </a:solidFill>
+              </a:rPr>
+              <a:t>In such scenarios, the rhythm and pacing of the video depends on the structure of the song.</a:t>
+            </a:r>
+          </a:p>
+          <a:p>
+            <a:endParaRPr lang="en-US" dirty="0"/>
+          </a:p>
+        </p:txBody>
+      </p:sp>
+    </p:spTree>
+    <p:extLst>
+      <p:ext uri="{BB962C8B-B14F-4D97-AF65-F5344CB8AC3E}">
+        <p14:creationId xmlns:p14="http://schemas.microsoft.com/office/powerpoint/2010/main" val="3616274226"/>
+      </p:ext>
+    </p:extLst>
+  </p:cSld>
+  <p:clrMapOvr>
+    <a:masterClrMapping/>
+  </p:clrMapOvr>
+</p:sld>
+</file>
+
+<file path=ppt/slides/slide15.xml><?xml version="1.0" encoding="utf-8"?>
+<p:sld xmlns:a="http://schemas.openxmlformats.org/drawingml/2006/main" xmlns:r="http://schemas.openxmlformats.org/officeDocument/2006/relationships" xmlns:p="http://schemas.openxmlformats.org/presentationml/2006/main">
+  <p:cSld>
+    <p:spTree>
+      <p:nvGrpSpPr>
+        <p:cNvPr id="1" name=""/>
+        <p:cNvGrpSpPr/>
+        <p:nvPr/>
+      </p:nvGrpSpPr>
+      <p:grpSpPr>
+        <a:xfrm>
+          <a:off x="0" y="0"/>
+          <a:ext cx="0" cy="0"/>
+          <a:chOff x="0" y="0"/>
+          <a:chExt cx="0" cy="0"/>
+        </a:xfrm>
+      </p:grpSpPr>
+      <p:sp>
+        <p:nvSpPr>
+          <p:cNvPr id="2" name="Title 1">
+            <a:extLst>
+              <a:ext uri="{FF2B5EF4-FFF2-40B4-BE49-F238E27FC236}">
+                <a16:creationId xmlns:a16="http://schemas.microsoft.com/office/drawing/2014/main" id="{F76A21A0-BB46-4705-8F46-89738D9DBFDC}"/>
+              </a:ext>
+            </a:extLst>
+          </p:cNvPr>
+          <p:cNvSpPr>
+            <a:spLocks noGrp="1"/>
+          </p:cNvSpPr>
+          <p:nvPr>
+            <p:ph type="title"/>
+          </p:nvPr>
+        </p:nvSpPr>
+        <p:spPr/>
+        <p:txBody>
+          <a:bodyPr/>
+          <a:lstStyle/>
+          <a:p>
+            <a:r>
+              <a:rPr lang="en-US" dirty="0"/>
+              <a:t>The Demonstration</a:t>
+            </a:r>
+          </a:p>
+        </p:txBody>
+      </p:sp>
+      <p:pic>
+        <p:nvPicPr>
+          <p:cNvPr id="17410" name="Picture 2" descr="Image result for students exam">
+            <a:extLst>
+              <a:ext uri="{FF2B5EF4-FFF2-40B4-BE49-F238E27FC236}">
+                <a16:creationId xmlns:a16="http://schemas.microsoft.com/office/drawing/2014/main" id="{C9F023E6-C609-4622-8476-D7B6D30159DC}"/>
+              </a:ext>
+            </a:extLst>
+          </p:cNvPr>
+          <p:cNvPicPr>
+            <a:picLocks noChangeAspect="1" noChangeArrowheads="1"/>
+          </p:cNvPicPr>
+          <p:nvPr/>
+        </p:nvPicPr>
+        <p:blipFill rotWithShape="1">
+          <a:blip r:embed="rId3">
+            <a:extLst>
+              <a:ext uri="{28A0092B-C50C-407E-A947-70E740481C1C}">
+                <a14:useLocalDpi xmlns:a14="http://schemas.microsoft.com/office/drawing/2010/main" val="0"/>
+              </a:ext>
+            </a:extLst>
+          </a:blip>
+          <a:srcRect l="16128"/>
+          <a:stretch/>
+        </p:blipFill>
+        <p:spPr bwMode="auto">
+          <a:xfrm>
+            <a:off x="978795" y="2556932"/>
+            <a:ext cx="4448086" cy="3318937"/>
+          </a:xfrm>
+          <a:prstGeom prst="rect">
+            <a:avLst/>
+          </a:prstGeom>
+          <a:noFill/>
+          <a:extLst>
+            <a:ext uri="{909E8E84-426E-40DD-AFC4-6F175D3DCCD1}">
+              <a14:hiddenFill xmlns:a14="http://schemas.microsoft.com/office/drawing/2010/main">
+                <a:solidFill>
+                  <a:srgbClr val="FFFFFF"/>
+                </a:solidFill>
+              </a14:hiddenFill>
+            </a:ext>
+          </a:extLst>
+        </p:spPr>
+      </p:pic>
+      <p:pic>
+        <p:nvPicPr>
+          <p:cNvPr id="17412" name="Picture 4" descr="Image result for girl sleeping">
+            <a:extLst>
+              <a:ext uri="{FF2B5EF4-FFF2-40B4-BE49-F238E27FC236}">
+                <a16:creationId xmlns:a16="http://schemas.microsoft.com/office/drawing/2014/main" id="{80488CED-29F8-4E10-927D-5BF745D48B11}"/>
+              </a:ext>
+            </a:extLst>
+          </p:cNvPr>
+          <p:cNvPicPr>
+            <a:picLocks noChangeAspect="1" noChangeArrowheads="1"/>
+          </p:cNvPicPr>
+          <p:nvPr/>
+        </p:nvPicPr>
+        <p:blipFill rotWithShape="1">
+          <a:blip r:embed="rId4">
+            <a:extLst>
+              <a:ext uri="{28A0092B-C50C-407E-A947-70E740481C1C}">
+                <a14:useLocalDpi xmlns:a14="http://schemas.microsoft.com/office/drawing/2010/main" val="0"/>
+              </a:ext>
+            </a:extLst>
+          </a:blip>
+          <a:srcRect r="1557"/>
+          <a:stretch/>
+        </p:blipFill>
+        <p:spPr bwMode="auto">
+          <a:xfrm>
+            <a:off x="5426881" y="2556932"/>
+            <a:ext cx="5786324" cy="3311473"/>
+          </a:xfrm>
+          <a:prstGeom prst="rect">
+            <a:avLst/>
+          </a:prstGeom>
+          <a:noFill/>
+          <a:extLst>
+            <a:ext uri="{909E8E84-426E-40DD-AFC4-6F175D3DCCD1}">
+              <a14:hiddenFill xmlns:a14="http://schemas.microsoft.com/office/drawing/2010/main">
+                <a:solidFill>
+                  <a:srgbClr val="FFFFFF"/>
+                </a:solidFill>
+              </a14:hiddenFill>
+            </a:ext>
+          </a:extLst>
+        </p:spPr>
+      </p:pic>
+    </p:spTree>
+    <p:extLst>
+      <p:ext uri="{BB962C8B-B14F-4D97-AF65-F5344CB8AC3E}">
+        <p14:creationId xmlns:p14="http://schemas.microsoft.com/office/powerpoint/2010/main" val="1300877336"/>
+      </p:ext>
+    </p:extLst>
+  </p:cSld>
+  <p:clrMapOvr>
+    <a:masterClrMapping/>
+  </p:clrMapOvr>
+</p:sld>
+</file>
+
+<file path=ppt/slides/slide16.xml><?xml version="1.0" encoding="utf-8"?>
+<p:sld xmlns:a="http://schemas.openxmlformats.org/drawingml/2006/main" xmlns:r="http://schemas.openxmlformats.org/officeDocument/2006/relationships" xmlns:p="http://schemas.openxmlformats.org/presentationml/2006/main">
+  <p:cSld>
+    <p:spTree>
+      <p:nvGrpSpPr>
+        <p:cNvPr id="1" name=""/>
+        <p:cNvGrpSpPr/>
+        <p:nvPr/>
+      </p:nvGrpSpPr>
+      <p:grpSpPr>
+        <a:xfrm>
+          <a:off x="0" y="0"/>
+          <a:ext cx="0" cy="0"/>
+          <a:chOff x="0" y="0"/>
+          <a:chExt cx="0" cy="0"/>
+        </a:xfrm>
+      </p:grpSpPr>
+      <p:sp>
+        <p:nvSpPr>
+          <p:cNvPr id="2" name="Title 1">
+            <a:extLst>
+              <a:ext uri="{FF2B5EF4-FFF2-40B4-BE49-F238E27FC236}">
+                <a16:creationId xmlns:a16="http://schemas.microsoft.com/office/drawing/2014/main" id="{F76A21A0-BB46-4705-8F46-89738D9DBFDC}"/>
+              </a:ext>
+            </a:extLst>
+          </p:cNvPr>
+          <p:cNvSpPr>
+            <a:spLocks noGrp="1"/>
+          </p:cNvSpPr>
+          <p:nvPr>
+            <p:ph type="title"/>
+          </p:nvPr>
+        </p:nvSpPr>
+        <p:spPr/>
+        <p:txBody>
+          <a:bodyPr/>
+          <a:lstStyle/>
+          <a:p>
+            <a:r>
+              <a:rPr lang="en-US" dirty="0"/>
+              <a:t>Soviet Montage, 1920s</a:t>
+            </a:r>
+          </a:p>
+        </p:txBody>
+      </p:sp>
+      <p:sp>
+        <p:nvSpPr>
+          <p:cNvPr id="3" name="Content Placeholder 2">
+            <a:extLst>
+              <a:ext uri="{FF2B5EF4-FFF2-40B4-BE49-F238E27FC236}">
+                <a16:creationId xmlns:a16="http://schemas.microsoft.com/office/drawing/2014/main" id="{DEC16AA6-B58B-4D32-9CF5-6757FC0A83C0}"/>
+              </a:ext>
+            </a:extLst>
+          </p:cNvPr>
+          <p:cNvSpPr>
+            <a:spLocks noGrp="1"/>
+          </p:cNvSpPr>
+          <p:nvPr>
+            <p:ph idx="1"/>
+          </p:nvPr>
+        </p:nvSpPr>
+        <p:spPr>
+          <a:xfrm>
+            <a:off x="5344733" y="2697162"/>
+            <a:ext cx="5551864" cy="3178706"/>
+          </a:xfrm>
+        </p:spPr>
+        <p:txBody>
+          <a:bodyPr>
+            <a:normAutofit/>
+          </a:bodyPr>
+          <a:lstStyle/>
+          <a:p>
+            <a:r>
+              <a:rPr lang="en-US" dirty="0">
+                <a:solidFill>
+                  <a:schemeClr val="tx1"/>
+                </a:solidFill>
+              </a:rPr>
+              <a:t>Developed by Soviet filmmakers: Sergei Eisenstein and Dziga Vertov.</a:t>
+            </a:r>
+          </a:p>
+          <a:p>
+            <a:r>
+              <a:rPr lang="en-US" dirty="0">
+                <a:solidFill>
+                  <a:schemeClr val="tx1"/>
+                </a:solidFill>
+              </a:rPr>
+              <a:t>The most famous sequence is the Odessa Steps from Eisenstein's Battleship Potemkin.</a:t>
+            </a:r>
+          </a:p>
+          <a:p>
+            <a:r>
+              <a:rPr lang="en-US" dirty="0">
+                <a:solidFill>
+                  <a:schemeClr val="tx1"/>
+                </a:solidFill>
+              </a:rPr>
+              <a:t>Soldiers' boots descending. A mother screaming. A pram on the steps.</a:t>
+            </a:r>
+          </a:p>
+          <a:p>
+            <a:r>
+              <a:rPr lang="en-US" dirty="0">
+                <a:solidFill>
+                  <a:schemeClr val="tx1"/>
+                </a:solidFill>
+              </a:rPr>
+              <a:t>No single shot contains the massacre. The sequence does.</a:t>
+            </a:r>
+          </a:p>
+        </p:txBody>
+      </p:sp>
+      <p:pic>
+        <p:nvPicPr>
+          <p:cNvPr id="18434" name="Picture 2" descr="Image result for battleship potemkin odessa steps">
+            <a:extLst>
+              <a:ext uri="{FF2B5EF4-FFF2-40B4-BE49-F238E27FC236}">
+                <a16:creationId xmlns:a16="http://schemas.microsoft.com/office/drawing/2014/main" id="{26E154F6-1F2D-42DB-B3EB-18A346A59BAD}"/>
+              </a:ext>
+            </a:extLst>
+          </p:cNvPr>
+          <p:cNvPicPr>
+            <a:picLocks noChangeAspect="1" noChangeArrowheads="1"/>
+          </p:cNvPicPr>
+          <p:nvPr/>
+        </p:nvPicPr>
+        <p:blipFill>
+          <a:blip r:embed="rId3">
+            <a:extLst>
+              <a:ext uri="{28A0092B-C50C-407E-A947-70E740481C1C}">
+                <a14:useLocalDpi xmlns:a14="http://schemas.microsoft.com/office/drawing/2010/main" val="0"/>
+              </a:ext>
+            </a:extLst>
+          </a:blip>
+          <a:srcRect/>
+          <a:stretch>
+            <a:fillRect/>
+          </a:stretch>
+        </p:blipFill>
+        <p:spPr bwMode="auto">
+          <a:xfrm>
+            <a:off x="1329748" y="2697162"/>
+            <a:ext cx="3810000" cy="3038475"/>
+          </a:xfrm>
+          <a:prstGeom prst="rect">
+            <a:avLst/>
+          </a:prstGeom>
+          <a:noFill/>
+          <a:extLst>
+            <a:ext uri="{909E8E84-426E-40DD-AFC4-6F175D3DCCD1}">
+              <a14:hiddenFill xmlns:a14="http://schemas.microsoft.com/office/drawing/2010/main">
+                <a:solidFill>
+                  <a:srgbClr val="FFFFFF"/>
+                </a:solidFill>
+              </a14:hiddenFill>
+            </a:ext>
+          </a:extLst>
+        </p:spPr>
+      </p:pic>
+    </p:spTree>
+    <p:extLst>
+      <p:ext uri="{BB962C8B-B14F-4D97-AF65-F5344CB8AC3E}">
+        <p14:creationId xmlns:p14="http://schemas.microsoft.com/office/powerpoint/2010/main" val="2019769116"/>
+      </p:ext>
+    </p:extLst>
+  </p:cSld>
+  <p:clrMapOvr>
+    <a:masterClrMapping/>
+  </p:clrMapOvr>
+</p:sld>
+</file>
+
+<file path=ppt/slides/slide17.xml><?xml version="1.0" encoding="utf-8"?>
+<p:sld xmlns:a="http://schemas.openxmlformats.org/drawingml/2006/main" xmlns:r="http://schemas.openxmlformats.org/officeDocument/2006/relationships" xmlns:p="http://schemas.openxmlformats.org/presentationml/2006/main">
+  <p:cSld>
+    <p:spTree>
+      <p:nvGrpSpPr>
+        <p:cNvPr id="1" name=""/>
+        <p:cNvGrpSpPr/>
+        <p:nvPr/>
+      </p:nvGrpSpPr>
+      <p:grpSpPr>
+        <a:xfrm>
+          <a:off x="0" y="0"/>
+          <a:ext cx="0" cy="0"/>
+          <a:chOff x="0" y="0"/>
+          <a:chExt cx="0" cy="0"/>
+        </a:xfrm>
+      </p:grpSpPr>
+      <p:sp>
+        <p:nvSpPr>
+          <p:cNvPr id="2" name="Title 1">
+            <a:extLst>
+              <a:ext uri="{FF2B5EF4-FFF2-40B4-BE49-F238E27FC236}">
+                <a16:creationId xmlns:a16="http://schemas.microsoft.com/office/drawing/2014/main" id="{0D99D5DC-08DC-479D-813F-E55F2A1052C2}"/>
+              </a:ext>
+            </a:extLst>
+          </p:cNvPr>
+          <p:cNvSpPr>
+            <a:spLocks noGrp="1"/>
+          </p:cNvSpPr>
+          <p:nvPr>
+            <p:ph type="title"/>
+          </p:nvPr>
+        </p:nvSpPr>
+        <p:spPr/>
+        <p:txBody>
+          <a:bodyPr/>
+          <a:lstStyle/>
+          <a:p>
+            <a:r>
+              <a:rPr lang="en-US" dirty="0"/>
+              <a:t>Music Video Montage</a:t>
+            </a:r>
+          </a:p>
+        </p:txBody>
+      </p:sp>
+      <p:sp>
+        <p:nvSpPr>
+          <p:cNvPr id="3" name="Content Placeholder 2">
+            <a:extLst>
+              <a:ext uri="{FF2B5EF4-FFF2-40B4-BE49-F238E27FC236}">
+                <a16:creationId xmlns:a16="http://schemas.microsoft.com/office/drawing/2014/main" id="{7E8039CC-7267-4C89-936A-32ACBFCF38EB}"/>
+              </a:ext>
+            </a:extLst>
+          </p:cNvPr>
+          <p:cNvSpPr>
+            <a:spLocks noGrp="1"/>
+          </p:cNvSpPr>
+          <p:nvPr>
+            <p:ph idx="1"/>
+          </p:nvPr>
+        </p:nvSpPr>
+        <p:spPr>
+          <a:xfrm>
+            <a:off x="1295401" y="2556932"/>
+            <a:ext cx="6350539" cy="3318936"/>
+          </a:xfrm>
+        </p:spPr>
+        <p:txBody>
+          <a:bodyPr/>
+          <a:lstStyle/>
+          <a:p>
+            <a:r>
+              <a:rPr lang="en-US" dirty="0">
+                <a:solidFill>
+                  <a:schemeClr val="tx1"/>
+                </a:solidFill>
+              </a:rPr>
+              <a:t>Assembled around the song rather than around a story.</a:t>
+            </a:r>
+          </a:p>
+          <a:p>
+            <a:r>
+              <a:rPr lang="en-US" dirty="0">
+                <a:solidFill>
+                  <a:schemeClr val="tx1"/>
+                </a:solidFill>
+              </a:rPr>
+              <a:t>The rhythm and pacing of the cut follow the structure of the track.</a:t>
+            </a:r>
+          </a:p>
+          <a:p>
+            <a:r>
+              <a:rPr lang="en-US" dirty="0">
+                <a:solidFill>
+                  <a:schemeClr val="tx1"/>
+                </a:solidFill>
+              </a:rPr>
+              <a:t>Shots hold information relating to a single idea or theme, not a continuous action.</a:t>
+            </a:r>
+          </a:p>
+        </p:txBody>
+      </p:sp>
+    </p:spTree>
+    <p:extLst>
+      <p:ext uri="{BB962C8B-B14F-4D97-AF65-F5344CB8AC3E}">
+        <p14:creationId xmlns:p14="http://schemas.microsoft.com/office/powerpoint/2010/main" val="2904683537"/>
+      </p:ext>
+    </p:extLst>
+  </p:cSld>
+  <p:clrMapOvr>
+    <a:masterClrMapping/>
+  </p:clrMapOvr>
+</p:sld>
+</file>
+
+<file path=ppt/slides/slide18.xml><?xml version="1.0" encoding="utf-8"?>
+<p:sld xmlns:a="http://schemas.openxmlformats.org/drawingml/2006/main" xmlns:r="http://schemas.openxmlformats.org/officeDocument/2006/relationships" xmlns:p="http://schemas.openxmlformats.org/presentationml/2006/main">
+  <p:cSld>
+    <p:spTree>
+      <p:nvGrpSpPr>
+        <p:cNvPr id="1" name=""/>
+        <p:cNvGrpSpPr/>
+        <p:nvPr/>
+      </p:nvGrpSpPr>
+      <p:grpSpPr>
+        <a:xfrm>
+          <a:off x="0" y="0"/>
+          <a:ext cx="0" cy="0"/>
+          <a:chOff x="0" y="0"/>
+          <a:chExt cx="0" cy="0"/>
+        </a:xfrm>
+      </p:grpSpPr>
+      <p:sp>
+        <p:nvSpPr>
+          <p:cNvPr id="2" name="Title 1">
+            <a:extLst>
+              <a:ext uri="{FF2B5EF4-FFF2-40B4-BE49-F238E27FC236}">
+                <a16:creationId xmlns:a16="http://schemas.microsoft.com/office/drawing/2014/main" id="{0D99D5DC-08DC-479D-813F-E55F2A1052C2}"/>
+              </a:ext>
+            </a:extLst>
+          </p:cNvPr>
+          <p:cNvSpPr>
+            <a:spLocks noGrp="1"/>
+          </p:cNvSpPr>
+          <p:nvPr>
+            <p:ph type="title"/>
+          </p:nvPr>
+        </p:nvSpPr>
+        <p:spPr/>
+        <p:txBody>
+          <a:bodyPr/>
+          <a:lstStyle/>
+          <a:p>
+            <a:r>
+              <a:rPr lang="en-US" dirty="0"/>
+              <a:t>The Graphic Match</a:t>
+            </a:r>
+          </a:p>
+        </p:txBody>
+      </p:sp>
+      <p:sp>
+        <p:nvSpPr>
+          <p:cNvPr id="3" name="Content Placeholder 2">
+            <a:extLst>
+              <a:ext uri="{FF2B5EF4-FFF2-40B4-BE49-F238E27FC236}">
+                <a16:creationId xmlns:a16="http://schemas.microsoft.com/office/drawing/2014/main" id="{7E8039CC-7267-4C89-936A-32ACBFCF38EB}"/>
+              </a:ext>
+            </a:extLst>
+          </p:cNvPr>
+          <p:cNvSpPr>
+            <a:spLocks noGrp="1"/>
+          </p:cNvSpPr>
+          <p:nvPr>
+            <p:ph idx="1"/>
+          </p:nvPr>
+        </p:nvSpPr>
+        <p:spPr>
+          <a:xfrm>
+            <a:off x="1298448" y="2788920"/>
+            <a:ext cx="4846320" cy="3017520"/>
+          </a:xfrm>
+        </p:spPr>
+        <p:txBody>
+          <a:bodyPr/>
+          <a:lstStyle/>
+          <a:p>
+            <a:r>
+              <a:rPr lang="en-US" dirty="0">
+                <a:solidFill>
+                  <a:schemeClr val="tx1"/>
+                </a:solidFill>
+              </a:rPr>
+              <a:t>A shape in one shot echoed by a shape in the next.</a:t>
+            </a:r>
+          </a:p>
+          <a:p>
+            <a:r>
+              <a:rPr lang="en-US" dirty="0">
+                <a:solidFill>
+                  <a:schemeClr val="tx1"/>
+                </a:solidFill>
+              </a:rPr>
+              <a:t>2001: the bone tumbling in the air becomes a spacecraft.</a:t>
+            </a:r>
+          </a:p>
+          <a:p>
+            <a:r>
+              <a:rPr lang="en-US" dirty="0">
+                <a:solidFill>
+                  <a:schemeClr val="tx1"/>
+                </a:solidFill>
+              </a:rPr>
+              <a:t>The eye accepts the substitution before the brain catches up.</a:t>
+            </a:r>
+          </a:p>
+        </p:txBody>
+      </p:sp>
+      <p:pic>
+        <p:nvPicPr>
+          <p:cNvPr id="4" name="2001 match cut"/>
+          <p:cNvPicPr>
+            <a:picLocks noChangeAspect="1"/>
+          </p:cNvPicPr>
+          <p:nvPr/>
+        </p:nvPicPr>
+        <p:blipFill>
+          <a:blip r:embed="rId2"/>
+          <a:stretch>
+            <a:fillRect/>
+          </a:stretch>
+        </p:blipFill>
+        <p:spPr>
+          <a:xfrm>
+            <a:off x="6537960" y="3017520"/>
+            <a:ext cx="4297680" cy="2148840"/>
+          </a:xfrm>
+          <a:prstGeom prst="rect">
+            <a:avLst/>
+          </a:prstGeom>
+        </p:spPr>
+      </p:pic>
+    </p:spTree>
+    <p:extLst>
+      <p:ext uri="{BB962C8B-B14F-4D97-AF65-F5344CB8AC3E}">
+        <p14:creationId xmlns:p14="http://schemas.microsoft.com/office/powerpoint/2010/main" val="2904683537"/>
+      </p:ext>
+    </p:extLst>
+  </p:cSld>
+  <p:clrMapOvr>
+    <a:masterClrMapping/>
+  </p:clrMapOvr>
+</p:sld>
+</file>
+
+<file path=ppt/slides/slide19.xml><?xml version="1.0" encoding="utf-8"?>
+<p:sld xmlns:a="http://schemas.openxmlformats.org/drawingml/2006/main" xmlns:r="http://schemas.openxmlformats.org/officeDocument/2006/relationships" xmlns:p="http://schemas.openxmlformats.org/presentationml/2006/main">
+  <p:cSld>
+    <p:spTree>
+      <p:nvGrpSpPr>
+        <p:cNvPr id="1" name=""/>
+        <p:cNvGrpSpPr/>
+        <p:nvPr/>
+      </p:nvGrpSpPr>
+      <p:grpSpPr>
+        <a:xfrm>
+          <a:off x="0" y="0"/>
+          <a:ext cx="0" cy="0"/>
+          <a:chOff x="0" y="0"/>
+          <a:chExt cx="0" cy="0"/>
+        </a:xfrm>
+      </p:grpSpPr>
+      <p:sp>
+        <p:nvSpPr>
+          <p:cNvPr id="2" name="Title 1">
+            <a:extLst>
+              <a:ext uri="{FF2B5EF4-FFF2-40B4-BE49-F238E27FC236}">
+                <a16:creationId xmlns:a16="http://schemas.microsoft.com/office/drawing/2014/main" id="{0D99D5DC-08DC-479D-813F-E55F2A1052C2}"/>
+              </a:ext>
+            </a:extLst>
+          </p:cNvPr>
+          <p:cNvSpPr>
+            <a:spLocks noGrp="1"/>
+          </p:cNvSpPr>
+          <p:nvPr>
+            <p:ph type="title"/>
+          </p:nvPr>
+        </p:nvSpPr>
+        <p:spPr/>
+        <p:txBody>
+          <a:bodyPr/>
+          <a:lstStyle/>
+          <a:p>
+            <a:r>
+              <a:rPr lang="en-US" dirty="0"/>
+              <a:t>Contrast Across the Cut</a:t>
+            </a:r>
+          </a:p>
+        </p:txBody>
+      </p:sp>
+      <p:sp>
+        <p:nvSpPr>
+          <p:cNvPr id="3" name="Content Placeholder 2">
+            <a:extLst>
+              <a:ext uri="{FF2B5EF4-FFF2-40B4-BE49-F238E27FC236}">
+                <a16:creationId xmlns:a16="http://schemas.microsoft.com/office/drawing/2014/main" id="{7E8039CC-7267-4C89-936A-32ACBFCF38EB}"/>
+              </a:ext>
+            </a:extLst>
+          </p:cNvPr>
+          <p:cNvSpPr>
+            <a:spLocks noGrp="1"/>
+          </p:cNvSpPr>
+          <p:nvPr>
+            <p:ph idx="1"/>
+          </p:nvPr>
+        </p:nvSpPr>
+        <p:spPr>
+          <a:xfrm>
+            <a:off x="1295401" y="2556932"/>
+            <a:ext cx="6350539" cy="3318936"/>
+          </a:xfrm>
+        </p:spPr>
+        <p:txBody>
+          <a:bodyPr/>
+          <a:lstStyle/>
+          <a:p>
+            <a:r>
+              <a:rPr lang="en-US" dirty="0">
+                <a:solidFill>
+                  <a:schemeClr val="tx1"/>
+                </a:solidFill>
+              </a:rPr>
+              <a:t>Wide to close. Light to dark. Empty to full.</a:t>
+            </a:r>
+          </a:p>
+          <a:p>
+            <a:r>
+              <a:rPr lang="en-US" dirty="0">
+                <a:solidFill>
+                  <a:schemeClr val="tx1"/>
+                </a:solidFill>
+              </a:rPr>
+              <a:t>If two consecutive panels have the same composition, the cut is invisible in the bad way.</a:t>
+            </a:r>
+          </a:p>
+          <a:p>
+            <a:r>
+              <a:rPr lang="en-US" dirty="0">
+                <a:solidFill>
+                  <a:schemeClr val="tx1"/>
+                </a:solidFill>
+              </a:rPr>
+              <a:t>Change something deliberately, or the audience registers a stutter rather than a cut.</a:t>
+            </a:r>
+          </a:p>
+        </p:txBody>
+      </p:sp>
+    </p:spTree>
+    <p:extLst>
+      <p:ext uri="{BB962C8B-B14F-4D97-AF65-F5344CB8AC3E}">
+        <p14:creationId xmlns:p14="http://schemas.microsoft.com/office/powerpoint/2010/main" val="2904683537"/>
+      </p:ext>
+    </p:extLst>
+  </p:cSld>
+  <p:clrMapOvr>
+    <a:masterClrMapping/>
+  </p:clrMapOvr>
+</p:sld>
+</file>
+
+<file path=ppt/slides/slide2.xml><?xml version="1.0" encoding="utf-8"?>
+<p:sld xmlns:a="http://schemas.openxmlformats.org/drawingml/2006/main" xmlns:r="http://schemas.openxmlformats.org/officeDocument/2006/relationships" xmlns:p="http://schemas.openxmlformats.org/presentationml/2006/main">
+  <p:cSld>
+    <p:spTree>
+      <p:nvGrpSpPr>
+        <p:cNvPr id="1" name=""/>
+        <p:cNvGrpSpPr/>
+        <p:nvPr/>
+      </p:nvGrpSpPr>
+      <p:grpSpPr>
+        <a:xfrm>
+          <a:off x="0" y="0"/>
+          <a:ext cx="0" cy="0"/>
+          <a:chOff x="0" y="0"/>
+          <a:chExt cx="0" cy="0"/>
+        </a:xfrm>
+      </p:grpSpPr>
+      <p:sp>
+        <p:nvSpPr>
+          <p:cNvPr id="2" name="Title 1"/>
+          <p:cNvSpPr>
+            <a:spLocks noGrp="1"/>
+          </p:cNvSpPr>
+          <p:nvPr>
+            <p:ph type="title"/>
+          </p:nvPr>
+        </p:nvSpPr>
+        <p:spPr/>
+        <p:txBody>
+          <a:bodyPr/>
+          <a:lstStyle/>
+          <a:p>
+            <a:r>
+              <a:rPr lang="en-US" sz="4400" dirty="0"/>
+              <a:t>What You Actually Control</a:t>
+            </a:r>
+          </a:p>
+        </p:txBody>
+      </p:sp>
+      <p:sp>
+        <p:nvSpPr>
+          <p:cNvPr id="3" name="Content Placeholder 2">
+            <a:extLst>
+              <a:ext uri="{FF2B5EF4-FFF2-40B4-BE49-F238E27FC236}">
+                <a16:creationId xmlns:a16="http://schemas.microsoft.com/office/drawing/2014/main" id="{1110D695-9451-4367-A285-C8085EAF9D2D}"/>
+              </a:ext>
+            </a:extLst>
+          </p:cNvPr>
+          <p:cNvSpPr>
+            <a:spLocks noGrp="1"/>
+          </p:cNvSpPr>
+          <p:nvPr>
+            <p:ph idx="1"/>
+          </p:nvPr>
+        </p:nvSpPr>
+        <p:spPr>
+          <a:xfrm>
+            <a:off x="1295401" y="2556932"/>
+            <a:ext cx="6661825" cy="3318936"/>
+          </a:xfrm>
+        </p:spPr>
+        <p:txBody>
+          <a:bodyPr/>
+          <a:lstStyle/>
+          <a:p>
+            <a:r>
+              <a:rPr lang="en-US" dirty="0">
+                <a:solidFill>
+                  <a:schemeClr val="tx1"/>
+                </a:solidFill>
+              </a:rPr>
+              <a:t>Continuity editing compresses or stretches time, depending on what the narrative needs.</a:t>
+            </a:r>
+          </a:p>
+          <a:p>
+            <a:r>
+              <a:rPr lang="en-US" dirty="0">
+                <a:solidFill>
+                  <a:schemeClr val="tx1"/>
+                </a:solidFill>
+              </a:rPr>
+              <a:t>It links the action of an individual shot to the bigger picture of the story.</a:t>
+            </a:r>
+          </a:p>
+          <a:p>
+            <a:r>
+              <a:rPr lang="en-US" dirty="0">
+                <a:solidFill>
+                  <a:schemeClr val="tx1"/>
+                </a:solidFill>
+              </a:rPr>
+              <a:t>If it works, the audience never sees the manipulation, they see one continuous whole.</a:t>
+            </a:r>
+          </a:p>
+        </p:txBody>
+      </p:sp>
+    </p:spTree>
+    <p:extLst>
+      <p:ext uri="{BB962C8B-B14F-4D97-AF65-F5344CB8AC3E}">
+        <p14:creationId xmlns:p14="http://schemas.microsoft.com/office/powerpoint/2010/main" val="4014882690"/>
+      </p:ext>
+    </p:extLst>
+  </p:cSld>
+  <p:clrMapOvr>
+    <a:masterClrMapping/>
+  </p:clrMapOvr>
+</p:sld>
+</file>
+
+<file path=ppt/slides/slide20.xml><?xml version="1.0" encoding="utf-8"?>
+<p:sld xmlns:a="http://schemas.openxmlformats.org/drawingml/2006/main" xmlns:r="http://schemas.openxmlformats.org/officeDocument/2006/relationships" xmlns:p="http://schemas.openxmlformats.org/presentationml/2006/main">
+  <p:cSld>
+    <p:spTree>
+      <p:nvGrpSpPr>
+        <p:cNvPr id="1" name=""/>
+        <p:cNvGrpSpPr/>
+        <p:nvPr/>
+      </p:nvGrpSpPr>
+      <p:grpSpPr>
+        <a:xfrm>
+          <a:off x="0" y="0"/>
+          <a:ext cx="0" cy="0"/>
+          <a:chOff x="0" y="0"/>
+          <a:chExt cx="0" cy="0"/>
+        </a:xfrm>
+      </p:grpSpPr>
+      <p:sp>
+        <p:nvSpPr>
+          <p:cNvPr id="2" name="Title 1">
+            <a:extLst>
+              <a:ext uri="{FF2B5EF4-FFF2-40B4-BE49-F238E27FC236}">
+                <a16:creationId xmlns:a16="http://schemas.microsoft.com/office/drawing/2014/main" id="{0D99D5DC-08DC-479D-813F-E55F2A1052C2}"/>
+              </a:ext>
+            </a:extLst>
+          </p:cNvPr>
+          <p:cNvSpPr>
+            <a:spLocks noGrp="1"/>
+          </p:cNvSpPr>
+          <p:nvPr>
+            <p:ph type="title"/>
+          </p:nvPr>
+        </p:nvSpPr>
+        <p:spPr/>
+        <p:txBody>
+          <a:bodyPr/>
+          <a:lstStyle/>
+          <a:p>
+            <a:r>
+              <a:rPr lang="en-US" dirty="0"/>
+              <a:t>Continuity of Position</a:t>
+            </a:r>
+          </a:p>
+        </p:txBody>
+      </p:sp>
+      <p:sp>
+        <p:nvSpPr>
+          <p:cNvPr id="3" name="Content Placeholder 2">
+            <a:extLst>
+              <a:ext uri="{FF2B5EF4-FFF2-40B4-BE49-F238E27FC236}">
+                <a16:creationId xmlns:a16="http://schemas.microsoft.com/office/drawing/2014/main" id="{7E8039CC-7267-4C89-936A-32ACBFCF38EB}"/>
+              </a:ext>
+            </a:extLst>
+          </p:cNvPr>
+          <p:cNvSpPr>
+            <a:spLocks noGrp="1"/>
+          </p:cNvSpPr>
+          <p:nvPr>
+            <p:ph idx="1"/>
+          </p:nvPr>
+        </p:nvSpPr>
+        <p:spPr>
+          <a:xfrm>
+            <a:off x="1295401" y="2556932"/>
+            <a:ext cx="6350539" cy="3318936"/>
+          </a:xfrm>
+        </p:spPr>
+        <p:txBody>
+          <a:bodyPr/>
+          <a:lstStyle/>
+          <a:p>
+            <a:r>
+              <a:rPr lang="en-US" dirty="0">
+                <a:solidFill>
+                  <a:schemeClr val="tx1"/>
+                </a:solidFill>
+              </a:rPr>
+              <a:t>The audience's eye is already somewhere when your cut lands.</a:t>
+            </a:r>
+          </a:p>
+          <a:p>
+            <a:r>
+              <a:rPr lang="en-US" dirty="0">
+                <a:solidFill>
+                  <a:schemeClr val="tx1"/>
+                </a:solidFill>
+              </a:rPr>
+              <a:t>Put the next subject there, or move it deliberately and make them travel.</a:t>
+            </a:r>
+          </a:p>
+          <a:p>
+            <a:r>
+              <a:rPr lang="en-US" dirty="0">
+                <a:solidFill>
+                  <a:schemeClr val="tx1"/>
+                </a:solidFill>
+              </a:rPr>
+              <a:t>Either is fine. Neither by accident.</a:t>
+            </a:r>
+          </a:p>
+        </p:txBody>
+      </p:sp>
+    </p:spTree>
+    <p:extLst>
+      <p:ext uri="{BB962C8B-B14F-4D97-AF65-F5344CB8AC3E}">
+        <p14:creationId xmlns:p14="http://schemas.microsoft.com/office/powerpoint/2010/main" val="2904683537"/>
+      </p:ext>
+    </p:extLst>
+  </p:cSld>
+  <p:clrMapOvr>
+    <a:masterClrMapping/>
+  </p:clrMapOvr>
+</p:sld>
+</file>
+
+<file path=ppt/slides/slide21.xml><?xml version="1.0" encoding="utf-8"?>
+<p:sld xmlns:a="http://schemas.openxmlformats.org/drawingml/2006/main" xmlns:r="http://schemas.openxmlformats.org/officeDocument/2006/relationships" xmlns:p="http://schemas.openxmlformats.org/presentationml/2006/main">
+  <p:cSld>
+    <p:spTree>
+      <p:nvGrpSpPr>
+        <p:cNvPr id="1" name=""/>
+        <p:cNvGrpSpPr/>
+        <p:nvPr/>
+      </p:nvGrpSpPr>
+      <p:grpSpPr>
+        <a:xfrm>
+          <a:off x="0" y="0"/>
+          <a:ext cx="0" cy="0"/>
+          <a:chOff x="0" y="0"/>
+          <a:chExt cx="0" cy="0"/>
+        </a:xfrm>
+      </p:grpSpPr>
+      <p:sp>
+        <p:nvSpPr>
+          <p:cNvPr id="2" name="Title 1">
+            <a:extLst>
+              <a:ext uri="{FF2B5EF4-FFF2-40B4-BE49-F238E27FC236}">
+                <a16:creationId xmlns:a16="http://schemas.microsoft.com/office/drawing/2014/main" id="{0D99D5DC-08DC-479D-813F-E55F2A1052C2}"/>
+              </a:ext>
+            </a:extLst>
+          </p:cNvPr>
+          <p:cNvSpPr>
+            <a:spLocks noGrp="1"/>
+          </p:cNvSpPr>
+          <p:nvPr>
+            <p:ph type="title"/>
+          </p:nvPr>
+        </p:nvSpPr>
+        <p:spPr/>
+        <p:txBody>
+          <a:bodyPr/>
+          <a:lstStyle/>
+          <a:p>
+            <a:r>
+              <a:rPr lang="en-US" dirty="0"/>
+              <a:t>Motif and Visual Echo</a:t>
+            </a:r>
+          </a:p>
+        </p:txBody>
+      </p:sp>
+      <p:sp>
+        <p:nvSpPr>
+          <p:cNvPr id="3" name="Content Placeholder 2">
+            <a:extLst>
+              <a:ext uri="{FF2B5EF4-FFF2-40B4-BE49-F238E27FC236}">
+                <a16:creationId xmlns:a16="http://schemas.microsoft.com/office/drawing/2014/main" id="{7E8039CC-7267-4C89-936A-32ACBFCF38EB}"/>
+              </a:ext>
+            </a:extLst>
+          </p:cNvPr>
+          <p:cNvSpPr>
+            <a:spLocks noGrp="1"/>
+          </p:cNvSpPr>
+          <p:nvPr>
+            <p:ph idx="1"/>
+          </p:nvPr>
+        </p:nvSpPr>
+        <p:spPr>
+          <a:xfrm>
+            <a:off x="1295401" y="2556932"/>
+            <a:ext cx="6350539" cy="3318936"/>
+          </a:xfrm>
+        </p:spPr>
+        <p:txBody>
+          <a:bodyPr/>
+          <a:lstStyle/>
+          <a:p>
+            <a:r>
+              <a:rPr lang="en-US" dirty="0">
+                <a:solidFill>
+                  <a:schemeClr val="tx1"/>
+                </a:solidFill>
+              </a:rPr>
+              <a:t>Repeating a composition so that its return means something.</a:t>
+            </a:r>
+          </a:p>
+          <a:p>
+            <a:r>
+              <a:rPr lang="en-US" dirty="0">
+                <a:solidFill>
+                  <a:schemeClr val="tx1"/>
+                </a:solidFill>
+              </a:rPr>
+              <a:t>Same frame, changed meaning.</a:t>
+            </a:r>
+          </a:p>
+          <a:p>
+            <a:r>
+              <a:rPr lang="en-US" dirty="0">
+                <a:solidFill>
+                  <a:schemeClr val="tx1"/>
+                </a:solidFill>
+              </a:rPr>
+              <a:t>One of the more satisfying tools in visual storytelling, and it costs nothing but planning.</a:t>
+            </a:r>
+          </a:p>
+        </p:txBody>
+      </p:sp>
+    </p:spTree>
+    <p:extLst>
+      <p:ext uri="{BB962C8B-B14F-4D97-AF65-F5344CB8AC3E}">
+        <p14:creationId xmlns:p14="http://schemas.microsoft.com/office/powerpoint/2010/main" val="2904683537"/>
+      </p:ext>
+    </p:extLst>
+  </p:cSld>
+  <p:clrMapOvr>
+    <a:masterClrMapping/>
+  </p:clrMapOvr>
+</p:sld>
+</file>
+
+<file path=ppt/slides/slide22.xml><?xml version="1.0" encoding="utf-8"?>
+<p:sld xmlns:a="http://schemas.openxmlformats.org/drawingml/2006/main" xmlns:r="http://schemas.openxmlformats.org/officeDocument/2006/relationships" xmlns:p="http://schemas.openxmlformats.org/presentationml/2006/main">
+  <p:cSld>
+    <p:spTree>
+      <p:nvGrpSpPr>
+        <p:cNvPr id="1" name=""/>
+        <p:cNvGrpSpPr/>
+        <p:nvPr/>
+      </p:nvGrpSpPr>
+      <p:grpSpPr>
+        <a:xfrm>
+          <a:off x="0" y="0"/>
+          <a:ext cx="0" cy="0"/>
+          <a:chOff x="0" y="0"/>
+          <a:chExt cx="0" cy="0"/>
+        </a:xfrm>
+      </p:grpSpPr>
+      <p:sp>
+        <p:nvSpPr>
+          <p:cNvPr id="2" name="Title 1">
+            <a:extLst>
+              <a:ext uri="{FF2B5EF4-FFF2-40B4-BE49-F238E27FC236}">
+                <a16:creationId xmlns:a16="http://schemas.microsoft.com/office/drawing/2014/main" id="{E6EB990C-D13E-4405-AA5B-6CA2633ABDE6}"/>
+              </a:ext>
+            </a:extLst>
+          </p:cNvPr>
+          <p:cNvSpPr>
+            <a:spLocks noGrp="1"/>
+          </p:cNvSpPr>
+          <p:nvPr>
+            <p:ph type="title"/>
+          </p:nvPr>
+        </p:nvSpPr>
+        <p:spPr/>
+        <p:txBody>
+          <a:bodyPr/>
+          <a:lstStyle/>
+          <a:p>
+            <a:r>
+              <a:rPr lang="en-US" dirty="0"/>
+              <a:t>Summary and Exercise</a:t>
+            </a:r>
+          </a:p>
+        </p:txBody>
+      </p:sp>
+      <p:sp>
+        <p:nvSpPr>
+          <p:cNvPr id="3" name="Content Placeholder 2">
+            <a:extLst>
+              <a:ext uri="{FF2B5EF4-FFF2-40B4-BE49-F238E27FC236}">
+                <a16:creationId xmlns:a16="http://schemas.microsoft.com/office/drawing/2014/main" id="{BF87E536-E4A8-43C8-87C3-F1353963A890}"/>
+              </a:ext>
+            </a:extLst>
+          </p:cNvPr>
+          <p:cNvSpPr>
+            <a:spLocks noGrp="1"/>
+          </p:cNvSpPr>
+          <p:nvPr>
+            <p:ph idx="1"/>
+          </p:nvPr>
+        </p:nvSpPr>
+        <p:spPr/>
+        <p:txBody>
+          <a:bodyPr/>
+          <a:lstStyle/>
+          <a:p>
+            <a:r>
+              <a:rPr lang="en-US" dirty="0">
+                <a:solidFill>
+                  <a:schemeClr val="tx1"/>
+                </a:solidFill>
+              </a:rPr>
+              <a:t>Continuity editing joins shots together to create dynamic meaning.</a:t>
+            </a:r>
+          </a:p>
+          <a:p>
+            <a:r>
+              <a:rPr lang="en-US" dirty="0">
+                <a:solidFill>
+                  <a:schemeClr val="tx1"/>
+                </a:solidFill>
+              </a:rPr>
+              <a:t>Done well, the audience does not notice how shots of different sizes and angles were spliced.</a:t>
+            </a:r>
+          </a:p>
+          <a:p>
+            <a:r>
+              <a:rPr lang="en-US" dirty="0">
+                <a:solidFill>
+                  <a:schemeClr val="tx1"/>
+                </a:solidFill>
+              </a:rPr>
+              <a:t>They see one continuous whole of uninterrupted action.</a:t>
+            </a:r>
+          </a:p>
+          <a:p>
+            <a:r>
+              <a:rPr lang="en-US" dirty="0">
+                <a:solidFill>
+                  <a:schemeClr val="tx1"/>
+                </a:solidFill>
+              </a:rPr>
+              <a:t>That is what we mean by CONTINUITY.</a:t>
+            </a:r>
+          </a:p>
+        </p:txBody>
+      </p:sp>
+    </p:spTree>
+    <p:extLst>
+      <p:ext uri="{BB962C8B-B14F-4D97-AF65-F5344CB8AC3E}">
+        <p14:creationId xmlns:p14="http://schemas.microsoft.com/office/powerpoint/2010/main" val="2158515074"/>
+      </p:ext>
+    </p:extLst>
+  </p:cSld>
+  <p:clrMapOvr>
+    <a:masterClrMapping/>
+  </p:clrMapOvr>
+</p:sld>
+</file>
+
+<file path=ppt/slides/slide3.xml><?xml version="1.0" encoding="utf-8"?>
 <p:sld xmlns:a="http://schemas.openxmlformats.org/drawingml/2006/main" xmlns:r="http://schemas.openxmlformats.org/officeDocument/2006/relationships" xmlns:p="http://schemas.openxmlformats.org/presentationml/2006/main">
   <p:cSld>
     <p:spTree>
@@ -9437,7 +11221,7 @@
 </p:sld>
 </file>
 
-<file path=ppt/slides/slide32.xml><?xml version="1.0" encoding="utf-8"?>
+<file path=ppt/slides/slide4.xml><?xml version="1.0" encoding="utf-8"?>
 <p:sld xmlns:a="http://schemas.openxmlformats.org/drawingml/2006/main" xmlns:r="http://schemas.openxmlformats.org/officeDocument/2006/relationships" xmlns:p="http://schemas.openxmlformats.org/presentationml/2006/main">
   <p:cSld>
     <p:spTree>
@@ -9536,7 +11320,7 @@
                   <a:schemeClr val="tx1"/>
                 </a:solidFill>
               </a:rPr>
-              <a:t>Working inside the psychological space of an interaction - what somebody is not saying.</a:t>
+              <a:t>Working inside the psychological space of an interaction: what somebody is not saying.</a:t>
             </a:r>
           </a:p>
           <a:p>
@@ -9611,7 +11395,7 @@
 </p:sld>
 </file>
 
-<file path=ppt/slides/slide33.xml><?xml version="1.0" encoding="utf-8"?>
+<file path=ppt/slides/slide5.xml><?xml version="1.0" encoding="utf-8"?>
 <p:sld xmlns:a="http://schemas.openxmlformats.org/drawingml/2006/main" xmlns:r="http://schemas.openxmlformats.org/officeDocument/2006/relationships" xmlns:p="http://schemas.openxmlformats.org/presentationml/2006/main">
   <p:cSld>
     <p:spTree>
@@ -9729,7 +11513,7 @@
 </p:sld>
 </file>
 
-<file path=ppt/slides/slide34.xml><?xml version="1.0" encoding="utf-8"?>
+<file path=ppt/slides/slide6.xml><?xml version="1.0" encoding="utf-8"?>
 <p:sld xmlns:a="http://schemas.openxmlformats.org/drawingml/2006/main" xmlns:r="http://schemas.openxmlformats.org/officeDocument/2006/relationships" xmlns:p="http://schemas.openxmlformats.org/presentationml/2006/main">
   <p:cSld>
     <p:spTree>
@@ -9842,7 +11626,7 @@
 </p:sld>
 </file>
 
-<file path=ppt/slides/slide35.xml><?xml version="1.0" encoding="utf-8"?>
+<file path=ppt/slides/slide7.xml><?xml version="1.0" encoding="utf-8"?>
 <p:sld xmlns:a="http://schemas.openxmlformats.org/drawingml/2006/main" xmlns:r="http://schemas.openxmlformats.org/officeDocument/2006/relationships" xmlns:p="http://schemas.openxmlformats.org/presentationml/2006/main">
   <p:cSld>
     <p:spTree>
@@ -9944,7 +11728,7 @@
                   <a:schemeClr val="tx1"/>
                 </a:solidFill>
               </a:rPr>
-              <a:t>Although the sequence last for 6 minutes, it is fairly fast-paced. </a:t>
+              <a:t>Although the sequence lasts around 6 minutes, it is fairly fast-paced. </a:t>
             </a:r>
           </a:p>
           <a:p>
@@ -10147,7 +11931,7 @@
 </p:sld>
 </file>
 
-<file path=ppt/slides/slide36.xml><?xml version="1.0" encoding="utf-8"?>
+<file path=ppt/slides/slide8.xml><?xml version="1.0" encoding="utf-8"?>
 <p:sld xmlns:a="http://schemas.openxmlformats.org/drawingml/2006/main" xmlns:r="http://schemas.openxmlformats.org/officeDocument/2006/relationships" xmlns:p="http://schemas.openxmlformats.org/presentationml/2006/main">
   <p:cSld>
     <p:spTree>
@@ -10221,7 +12005,7 @@
           <a:p>
             <a:r>
               <a:rPr lang="en-US" dirty="0"/>
-              <a:t>It contributes to the pace of the production - lyrical or abrupt.</a:t>
+              <a:t>It contributes to the pace of the production, lyrical or abrupt.</a:t>
             </a:r>
           </a:p>
           <a:p>
@@ -10245,7 +12029,7 @@
 </p:sld>
 </file>
 
-<file path=ppt/slides/slide37.xml><?xml version="1.0" encoding="utf-8"?>
+<file path=ppt/slides/slide9.xml><?xml version="1.0" encoding="utf-8"?>
 <p:sld xmlns:a="http://schemas.openxmlformats.org/drawingml/2006/main" xmlns:r="http://schemas.openxmlformats.org/officeDocument/2006/relationships" xmlns:p="http://schemas.openxmlformats.org/presentationml/2006/main">
   <p:cSld>
     <p:spTree>
@@ -10267,114 +12051,6 @@
           <p:cNvPr id="2" name="Title 1">
             <a:extLst>
               <a:ext uri="{FF2B5EF4-FFF2-40B4-BE49-F238E27FC236}">
-                <a16:creationId xmlns:a16="http://schemas.microsoft.com/office/drawing/2014/main" id="{45D11BE3-4440-4C5E-8091-47DC498FABF9}"/>
-              </a:ext>
-            </a:extLst>
-          </p:cNvPr>
-          <p:cNvSpPr>
-            <a:spLocks noGrp="1"/>
-          </p:cNvSpPr>
-          <p:nvPr>
-            <p:ph type="title"/>
-          </p:nvPr>
-        </p:nvSpPr>
-        <p:spPr/>
-        <p:txBody>
-          <a:bodyPr/>
-          <a:lstStyle/>
-          <a:p>
-            <a:r>
-              <a:rPr lang="en-US" dirty="0"/>
-              <a:t>Dissolve</a:t>
-            </a:r>
-          </a:p>
-        </p:txBody>
-      </p:sp>
-      <p:sp>
-        <p:nvSpPr>
-          <p:cNvPr id="3" name="Content Placeholder 2">
-            <a:extLst>
-              <a:ext uri="{FF2B5EF4-FFF2-40B4-BE49-F238E27FC236}">
-                <a16:creationId xmlns:a16="http://schemas.microsoft.com/office/drawing/2014/main" id="{B733F94E-A8B6-44A1-87CC-ECF44144CF16}"/>
-              </a:ext>
-            </a:extLst>
-          </p:cNvPr>
-          <p:cNvSpPr>
-            <a:spLocks noGrp="1"/>
-          </p:cNvSpPr>
-          <p:nvPr>
-            <p:ph idx="1"/>
-          </p:nvPr>
-        </p:nvSpPr>
-        <p:spPr/>
-        <p:txBody>
-          <a:bodyPr/>
-          <a:lstStyle/>
-          <a:p>
-            <a:r>
-              <a:rPr lang="en-US" dirty="0"/>
-              <a:t>Basically, when a piece of film strip was </a:t>
-            </a:r>
-            <a:r>
-              <a:rPr lang="en-US" b="1" dirty="0"/>
-              <a:t>superimposed</a:t>
-            </a:r>
-            <a:r>
-              <a:rPr lang="en-US" dirty="0"/>
-              <a:t> onto another, creating an </a:t>
-            </a:r>
-            <a:r>
-              <a:rPr lang="en-US" b="1" dirty="0"/>
-              <a:t>overlapping</a:t>
-            </a:r>
-            <a:r>
-              <a:rPr lang="en-US" dirty="0"/>
-              <a:t> image.</a:t>
-            </a:r>
-          </a:p>
-          <a:p>
-            <a:r>
-              <a:rPr lang="en-US" dirty="0"/>
-              <a:t>Can be any length, and are usually employed to show a time lapse or location change.</a:t>
-            </a:r>
-          </a:p>
-        </p:txBody>
-      </p:sp>
-    </p:spTree>
-    <p:extLst>
-      <p:ext uri="{BB962C8B-B14F-4D97-AF65-F5344CB8AC3E}">
-        <p14:creationId xmlns:p14="http://schemas.microsoft.com/office/powerpoint/2010/main" val="2321641938"/>
-      </p:ext>
-    </p:extLst>
-  </p:cSld>
-  <p:clrMapOvr>
-    <a:masterClrMapping/>
-  </p:clrMapOvr>
-</p:sld>
-</file>
-
-<file path=ppt/slides/slide38.xml><?xml version="1.0" encoding="utf-8"?>
-<p:sld xmlns:a="http://schemas.openxmlformats.org/drawingml/2006/main" xmlns:r="http://schemas.openxmlformats.org/officeDocument/2006/relationships" xmlns:p="http://schemas.openxmlformats.org/presentationml/2006/main">
-  <p:cSld>
-    <p:spTree>
-      <p:nvGrpSpPr>
-        <p:cNvPr id="1" name=""/>
-        <p:cNvGrpSpPr/>
-        <p:nvPr/>
-      </p:nvGrpSpPr>
-      <p:grpSpPr>
-        <a:xfrm>
-          <a:off x="0" y="0"/>
-          <a:ext cx="0" cy="0"/>
-          <a:chOff x="0" y="0"/>
-          <a:chExt cx="0" cy="0"/>
-        </a:xfrm>
-      </p:grpSpPr>
-      <p:sp>
-        <p:nvSpPr>
-          <p:cNvPr id="2" name="Title 1">
-            <a:extLst>
-              <a:ext uri="{FF2B5EF4-FFF2-40B4-BE49-F238E27FC236}">
                 <a16:creationId xmlns:a16="http://schemas.microsoft.com/office/drawing/2014/main" id="{2D059711-5047-49FE-9E59-F5749AA9EB37}"/>
               </a:ext>
             </a:extLst>
@@ -10509,1682 +12185,6 @@
     <p:extLst>
       <p:ext uri="{BB962C8B-B14F-4D97-AF65-F5344CB8AC3E}">
         <p14:creationId xmlns:p14="http://schemas.microsoft.com/office/powerpoint/2010/main" val="1197165432"/>
-      </p:ext>
-    </p:extLst>
-  </p:cSld>
-  <p:clrMapOvr>
-    <a:masterClrMapping/>
-  </p:clrMapOvr>
-</p:sld>
-</file>
-
-<file path=ppt/slides/slide39.xml><?xml version="1.0" encoding="utf-8"?>
-<p:sld xmlns:a="http://schemas.openxmlformats.org/drawingml/2006/main" xmlns:r="http://schemas.openxmlformats.org/officeDocument/2006/relationships" xmlns:p="http://schemas.openxmlformats.org/presentationml/2006/main">
-  <p:cSld>
-    <p:spTree>
-      <p:nvGrpSpPr>
-        <p:cNvPr id="1" name=""/>
-        <p:cNvGrpSpPr/>
-        <p:nvPr/>
-      </p:nvGrpSpPr>
-      <p:grpSpPr>
-        <a:xfrm>
-          <a:off x="0" y="0"/>
-          <a:ext cx="0" cy="0"/>
-          <a:chOff x="0" y="0"/>
-          <a:chExt cx="0" cy="0"/>
-        </a:xfrm>
-      </p:grpSpPr>
-      <p:sp>
-        <p:nvSpPr>
-          <p:cNvPr id="2" name="Title 1">
-            <a:extLst>
-              <a:ext uri="{FF2B5EF4-FFF2-40B4-BE49-F238E27FC236}">
-                <a16:creationId xmlns:a16="http://schemas.microsoft.com/office/drawing/2014/main" id="{EF2FD256-FA49-45AF-8632-9EE3112CAE1E}"/>
-              </a:ext>
-            </a:extLst>
-          </p:cNvPr>
-          <p:cNvSpPr>
-            <a:spLocks noGrp="1"/>
-          </p:cNvSpPr>
-          <p:nvPr>
-            <p:ph type="title"/>
-          </p:nvPr>
-        </p:nvSpPr>
-        <p:spPr/>
-        <p:txBody>
-          <a:bodyPr/>
-          <a:lstStyle/>
-          <a:p>
-            <a:r>
-              <a:rPr lang="en-US" dirty="0"/>
-              <a:t>Fade</a:t>
-            </a:r>
-          </a:p>
-        </p:txBody>
-      </p:sp>
-      <p:sp>
-        <p:nvSpPr>
-          <p:cNvPr id="3" name="Content Placeholder 2">
-            <a:extLst>
-              <a:ext uri="{FF2B5EF4-FFF2-40B4-BE49-F238E27FC236}">
-                <a16:creationId xmlns:a16="http://schemas.microsoft.com/office/drawing/2014/main" id="{E1E88A0E-251C-440E-870C-28AFF45B85ED}"/>
-              </a:ext>
-            </a:extLst>
-          </p:cNvPr>
-          <p:cNvSpPr>
-            <a:spLocks noGrp="1"/>
-          </p:cNvSpPr>
-          <p:nvPr>
-            <p:ph idx="1"/>
-          </p:nvPr>
-        </p:nvSpPr>
-        <p:spPr/>
-        <p:txBody>
-          <a:bodyPr>
-            <a:normAutofit lnSpcReduction="10000"/>
-          </a:bodyPr>
-          <a:lstStyle/>
-          <a:p>
-            <a:r>
-              <a:rPr lang="en-US" dirty="0">
-                <a:solidFill>
-                  <a:schemeClr val="tx1"/>
-                </a:solidFill>
-              </a:rPr>
-              <a:t>Used to denote a </a:t>
-            </a:r>
-            <a:r>
-              <a:rPr lang="en-US" b="1" dirty="0">
-                <a:solidFill>
-                  <a:schemeClr val="tx1"/>
-                </a:solidFill>
-              </a:rPr>
-              <a:t>passage of time</a:t>
-            </a:r>
-            <a:r>
-              <a:rPr lang="en-US" dirty="0">
-                <a:solidFill>
-                  <a:schemeClr val="tx1"/>
-                </a:solidFill>
-              </a:rPr>
-              <a:t> and should not be used in the present tense. </a:t>
-            </a:r>
-          </a:p>
-          <a:p>
-            <a:r>
-              <a:rPr lang="en-US" dirty="0">
-                <a:solidFill>
-                  <a:schemeClr val="tx1"/>
-                </a:solidFill>
-              </a:rPr>
-              <a:t>Fades are usually very subtle as the screen fades in or out from black. (if it fades to white, it's often called a white out)</a:t>
-            </a:r>
-          </a:p>
-          <a:p>
-            <a:r>
-              <a:rPr lang="en-US" dirty="0">
-                <a:solidFill>
-                  <a:schemeClr val="tx1"/>
-                </a:solidFill>
-              </a:rPr>
-              <a:t>A </a:t>
-            </a:r>
-            <a:r>
-              <a:rPr lang="en-US" b="1" dirty="0">
-                <a:solidFill>
-                  <a:schemeClr val="tx1"/>
-                </a:solidFill>
-              </a:rPr>
-              <a:t>Fade-In</a:t>
-            </a:r>
-            <a:r>
-              <a:rPr lang="en-US" dirty="0">
-                <a:solidFill>
-                  <a:schemeClr val="tx1"/>
-                </a:solidFill>
-              </a:rPr>
-              <a:t> is used to ease the audience into a setting by starting in black, and gradually lightening up the setting to full brightness. </a:t>
-            </a:r>
-          </a:p>
-          <a:p>
-            <a:r>
-              <a:rPr lang="en-US" dirty="0">
-                <a:solidFill>
-                  <a:schemeClr val="tx1"/>
-                </a:solidFill>
-              </a:rPr>
-              <a:t>A </a:t>
-            </a:r>
-            <a:r>
-              <a:rPr lang="en-US" b="1" dirty="0">
-                <a:solidFill>
-                  <a:schemeClr val="tx1"/>
-                </a:solidFill>
-              </a:rPr>
-              <a:t>Fade Out</a:t>
-            </a:r>
-            <a:r>
-              <a:rPr lang="en-US" dirty="0">
-                <a:solidFill>
-                  <a:schemeClr val="tx1"/>
-                </a:solidFill>
-              </a:rPr>
-              <a:t> is usually the last shot of a scene that gradually disappears into darkness.</a:t>
-            </a:r>
-          </a:p>
-          <a:p>
-            <a:endParaRPr lang="en-US" dirty="0"/>
-          </a:p>
-        </p:txBody>
-      </p:sp>
-    </p:spTree>
-    <p:extLst>
-      <p:ext uri="{BB962C8B-B14F-4D97-AF65-F5344CB8AC3E}">
-        <p14:creationId xmlns:p14="http://schemas.microsoft.com/office/powerpoint/2010/main" val="70159564"/>
-      </p:ext>
-    </p:extLst>
-  </p:cSld>
-  <p:clrMapOvr>
-    <a:masterClrMapping/>
-  </p:clrMapOvr>
-</p:sld>
-</file>
-
-<file path=ppt/slides/slide40.xml><?xml version="1.0" encoding="utf-8"?>
-<p:sld xmlns:a="http://schemas.openxmlformats.org/drawingml/2006/main" xmlns:r="http://schemas.openxmlformats.org/officeDocument/2006/relationships" xmlns:p="http://schemas.openxmlformats.org/presentationml/2006/main">
-  <p:cSld>
-    <p:spTree>
-      <p:nvGrpSpPr>
-        <p:cNvPr id="1" name=""/>
-        <p:cNvGrpSpPr/>
-        <p:nvPr/>
-      </p:nvGrpSpPr>
-      <p:grpSpPr>
-        <a:xfrm>
-          <a:off x="0" y="0"/>
-          <a:ext cx="0" cy="0"/>
-          <a:chOff x="0" y="0"/>
-          <a:chExt cx="0" cy="0"/>
-        </a:xfrm>
-      </p:grpSpPr>
-      <p:sp>
-        <p:nvSpPr>
-          <p:cNvPr id="2" name="Title 1">
-            <a:extLst>
-              <a:ext uri="{FF2B5EF4-FFF2-40B4-BE49-F238E27FC236}">
-                <a16:creationId xmlns:a16="http://schemas.microsoft.com/office/drawing/2014/main" id="{E0F115C0-0F99-4855-A2CC-12541815381F}"/>
-              </a:ext>
-            </a:extLst>
-          </p:cNvPr>
-          <p:cNvSpPr>
-            <a:spLocks noGrp="1"/>
-          </p:cNvSpPr>
-          <p:nvPr>
-            <p:ph type="title"/>
-          </p:nvPr>
-        </p:nvSpPr>
-        <p:spPr/>
-        <p:txBody>
-          <a:bodyPr/>
-          <a:lstStyle/>
-          <a:p>
-            <a:r>
-              <a:rPr lang="en-US" dirty="0"/>
-              <a:t>Wipe</a:t>
-            </a:r>
-          </a:p>
-        </p:txBody>
-      </p:sp>
-      <p:sp>
-        <p:nvSpPr>
-          <p:cNvPr id="3" name="Content Placeholder 2">
-            <a:extLst>
-              <a:ext uri="{FF2B5EF4-FFF2-40B4-BE49-F238E27FC236}">
-                <a16:creationId xmlns:a16="http://schemas.microsoft.com/office/drawing/2014/main" id="{4F0E944D-3A8E-486C-924A-7F2F19447042}"/>
-              </a:ext>
-            </a:extLst>
-          </p:cNvPr>
-          <p:cNvSpPr>
-            <a:spLocks noGrp="1"/>
-          </p:cNvSpPr>
-          <p:nvPr>
-            <p:ph idx="1"/>
-          </p:nvPr>
-        </p:nvSpPr>
-        <p:spPr/>
-        <p:txBody>
-          <a:bodyPr/>
-          <a:lstStyle/>
-          <a:p>
-            <a:endParaRPr lang="en-US" dirty="0"/>
-          </a:p>
-          <a:p>
-            <a:r>
-              <a:rPr lang="en-US" dirty="0">
-                <a:solidFill>
-                  <a:schemeClr val="tx1"/>
-                </a:solidFill>
-              </a:rPr>
-              <a:t>Wipes function the same way as the cut, transitioning from one shot to the next, but here it pushes one image off the screen with another image. </a:t>
-            </a:r>
-          </a:p>
-          <a:p>
-            <a:r>
-              <a:rPr lang="en-US" dirty="0">
-                <a:solidFill>
-                  <a:schemeClr val="tx1"/>
-                </a:solidFill>
-              </a:rPr>
-              <a:t>This showy technique was quite popular during the 1930s and 40s, but went out of fashion shortly after World War II. </a:t>
-            </a:r>
-          </a:p>
-          <a:p>
-            <a:r>
-              <a:rPr lang="en-US" dirty="0">
-                <a:solidFill>
-                  <a:schemeClr val="tx1"/>
-                </a:solidFill>
-              </a:rPr>
-              <a:t>The wipe made a Resurgence in the 1970s with the release of Star Wars, and can be seen in a handful of films today. </a:t>
-            </a:r>
-          </a:p>
-          <a:p>
-            <a:endParaRPr lang="en-US" dirty="0"/>
-          </a:p>
-          <a:p>
-            <a:endParaRPr lang="en-US" dirty="0"/>
-          </a:p>
-          <a:p>
-            <a:endParaRPr lang="en-US" dirty="0"/>
-          </a:p>
-        </p:txBody>
-      </p:sp>
-    </p:spTree>
-    <p:extLst>
-      <p:ext uri="{BB962C8B-B14F-4D97-AF65-F5344CB8AC3E}">
-        <p14:creationId xmlns:p14="http://schemas.microsoft.com/office/powerpoint/2010/main" val="525080044"/>
-      </p:ext>
-    </p:extLst>
-  </p:cSld>
-  <p:clrMapOvr>
-    <a:masterClrMapping/>
-  </p:clrMapOvr>
-</p:sld>
-</file>
-
-<file path=ppt/slides/slide41.xml><?xml version="1.0" encoding="utf-8"?>
-<p:sld xmlns:a="http://schemas.openxmlformats.org/drawingml/2006/main" xmlns:r="http://schemas.openxmlformats.org/officeDocument/2006/relationships" xmlns:p="http://schemas.openxmlformats.org/presentationml/2006/main">
-  <p:cSld>
-    <p:spTree>
-      <p:nvGrpSpPr>
-        <p:cNvPr id="1" name=""/>
-        <p:cNvGrpSpPr/>
-        <p:nvPr/>
-      </p:nvGrpSpPr>
-      <p:grpSpPr>
-        <a:xfrm>
-          <a:off x="0" y="0"/>
-          <a:ext cx="0" cy="0"/>
-          <a:chOff x="0" y="0"/>
-          <a:chExt cx="0" cy="0"/>
-        </a:xfrm>
-      </p:grpSpPr>
-      <p:sp>
-        <p:nvSpPr>
-          <p:cNvPr id="2" name="Title 1">
-            <a:extLst>
-              <a:ext uri="{FF2B5EF4-FFF2-40B4-BE49-F238E27FC236}">
-                <a16:creationId xmlns:a16="http://schemas.microsoft.com/office/drawing/2014/main" id="{D0986C61-E2FD-44AF-B478-6BF0F152AF52}"/>
-              </a:ext>
-            </a:extLst>
-          </p:cNvPr>
-          <p:cNvSpPr>
-            <a:spLocks noGrp="1"/>
-          </p:cNvSpPr>
-          <p:nvPr>
-            <p:ph type="title"/>
-          </p:nvPr>
-        </p:nvSpPr>
-        <p:spPr/>
-        <p:txBody>
-          <a:bodyPr/>
-          <a:lstStyle/>
-          <a:p>
-            <a:r>
-              <a:rPr lang="en-US" dirty="0"/>
-              <a:t>Jump Cut</a:t>
-            </a:r>
-          </a:p>
-        </p:txBody>
-      </p:sp>
-      <p:sp>
-        <p:nvSpPr>
-          <p:cNvPr id="3" name="Content Placeholder 2">
-            <a:extLst>
-              <a:ext uri="{FF2B5EF4-FFF2-40B4-BE49-F238E27FC236}">
-                <a16:creationId xmlns:a16="http://schemas.microsoft.com/office/drawing/2014/main" id="{91F6BC23-094B-423C-900C-9AE9219D40BA}"/>
-              </a:ext>
-            </a:extLst>
-          </p:cNvPr>
-          <p:cNvSpPr>
-            <a:spLocks noGrp="1"/>
-          </p:cNvSpPr>
-          <p:nvPr>
-            <p:ph idx="1"/>
-          </p:nvPr>
-        </p:nvSpPr>
-        <p:spPr/>
-        <p:txBody>
-          <a:bodyPr>
-            <a:normAutofit/>
-          </a:bodyPr>
-          <a:lstStyle/>
-          <a:p>
-            <a:r>
-              <a:rPr lang="en-US" dirty="0">
-                <a:solidFill>
-                  <a:schemeClr val="tx1"/>
-                </a:solidFill>
-              </a:rPr>
-              <a:t>Jump cuts are the opposite of continuity shots, using abrupt changes in movement to disrupt the illusion of a continuous flow of action .  </a:t>
-            </a:r>
-          </a:p>
-          <a:p>
-            <a:r>
-              <a:rPr lang="en-US" dirty="0">
-                <a:solidFill>
-                  <a:schemeClr val="tx1"/>
-                </a:solidFill>
-              </a:rPr>
-              <a:t>A jump can be achieved between Shots by maintaining the background and abruptly changing a character's position.  </a:t>
-            </a:r>
-          </a:p>
-          <a:p>
-            <a:r>
-              <a:rPr lang="en-US" dirty="0">
-                <a:solidFill>
-                  <a:schemeClr val="tx1"/>
-                </a:solidFill>
-              </a:rPr>
-              <a:t>Jump cuts are also achieved when character framing is the same from one shot to the next, but the camera has moved its position. </a:t>
-            </a:r>
-          </a:p>
-          <a:p>
-            <a:endParaRPr lang="en-US" dirty="0"/>
-          </a:p>
-          <a:p>
-            <a:endParaRPr lang="en-US" dirty="0"/>
-          </a:p>
-        </p:txBody>
-      </p:sp>
-    </p:spTree>
-    <p:extLst>
-      <p:ext uri="{BB962C8B-B14F-4D97-AF65-F5344CB8AC3E}">
-        <p14:creationId xmlns:p14="http://schemas.microsoft.com/office/powerpoint/2010/main" val="308922380"/>
-      </p:ext>
-    </p:extLst>
-  </p:cSld>
-  <p:clrMapOvr>
-    <a:masterClrMapping/>
-  </p:clrMapOvr>
-</p:sld>
-</file>
-
-<file path=ppt/slides/slide42.xml><?xml version="1.0" encoding="utf-8"?>
-<p:sld xmlns:a="http://schemas.openxmlformats.org/drawingml/2006/main" xmlns:r="http://schemas.openxmlformats.org/officeDocument/2006/relationships" xmlns:p="http://schemas.openxmlformats.org/presentationml/2006/main">
-  <p:cSld>
-    <p:spTree>
-      <p:nvGrpSpPr>
-        <p:cNvPr id="1" name=""/>
-        <p:cNvGrpSpPr/>
-        <p:nvPr/>
-      </p:nvGrpSpPr>
-      <p:grpSpPr>
-        <a:xfrm>
-          <a:off x="0" y="0"/>
-          <a:ext cx="0" cy="0"/>
-          <a:chOff x="0" y="0"/>
-          <a:chExt cx="0" cy="0"/>
-        </a:xfrm>
-      </p:grpSpPr>
-      <p:sp>
-        <p:nvSpPr>
-          <p:cNvPr id="2" name="Title 1">
-            <a:extLst>
-              <a:ext uri="{FF2B5EF4-FFF2-40B4-BE49-F238E27FC236}">
-                <a16:creationId xmlns:a16="http://schemas.microsoft.com/office/drawing/2014/main" id="{F76A21A0-BB46-4705-8F46-89738D9DBFDC}"/>
-              </a:ext>
-            </a:extLst>
-          </p:cNvPr>
-          <p:cNvSpPr>
-            <a:spLocks noGrp="1"/>
-          </p:cNvSpPr>
-          <p:nvPr>
-            <p:ph type="title"/>
-          </p:nvPr>
-        </p:nvSpPr>
-        <p:spPr/>
-        <p:txBody>
-          <a:bodyPr/>
-          <a:lstStyle/>
-          <a:p>
-            <a:r>
-              <a:rPr lang="en-US" dirty="0"/>
-              <a:t>Juxtaposition Creates Meaning</a:t>
-            </a:r>
-          </a:p>
-        </p:txBody>
-      </p:sp>
-      <p:sp>
-        <p:nvSpPr>
-          <p:cNvPr id="3" name="Content Placeholder 2">
-            <a:extLst>
-              <a:ext uri="{FF2B5EF4-FFF2-40B4-BE49-F238E27FC236}">
-                <a16:creationId xmlns:a16="http://schemas.microsoft.com/office/drawing/2014/main" id="{DEC16AA6-B58B-4D32-9CF5-6757FC0A83C0}"/>
-              </a:ext>
-            </a:extLst>
-          </p:cNvPr>
-          <p:cNvSpPr>
-            <a:spLocks noGrp="1"/>
-          </p:cNvSpPr>
-          <p:nvPr>
-            <p:ph idx="1"/>
-          </p:nvPr>
-        </p:nvSpPr>
-        <p:spPr/>
-        <p:txBody>
-          <a:bodyPr/>
-          <a:lstStyle/>
-          <a:p>
-            <a:r>
-              <a:rPr lang="en-US" dirty="0">
-                <a:solidFill>
-                  <a:schemeClr val="tx1"/>
-                </a:solidFill>
-              </a:rPr>
-              <a:t>Cinematic montage is a series of images that can be juxtaposed to create  meaning by evoking an emotional response. </a:t>
-            </a:r>
-          </a:p>
-          <a:p>
-            <a:r>
-              <a:rPr lang="en-US" dirty="0">
-                <a:solidFill>
-                  <a:schemeClr val="tx1"/>
-                </a:solidFill>
-              </a:rPr>
-              <a:t>The shots maintained information relating to a single idea or theme. Music videos are often assembled around the Montage sequence of a band or singer.  </a:t>
-            </a:r>
-          </a:p>
-          <a:p>
-            <a:r>
-              <a:rPr lang="en-US" dirty="0">
-                <a:solidFill>
-                  <a:schemeClr val="tx1"/>
-                </a:solidFill>
-              </a:rPr>
-              <a:t>In such scenarios, the rhythm and pacing of the video depends on the structure of the song.</a:t>
-            </a:r>
-          </a:p>
-          <a:p>
-            <a:endParaRPr lang="en-US" dirty="0"/>
-          </a:p>
-        </p:txBody>
-      </p:sp>
-    </p:spTree>
-    <p:extLst>
-      <p:ext uri="{BB962C8B-B14F-4D97-AF65-F5344CB8AC3E}">
-        <p14:creationId xmlns:p14="http://schemas.microsoft.com/office/powerpoint/2010/main" val="3616274226"/>
-      </p:ext>
-    </p:extLst>
-  </p:cSld>
-  <p:clrMapOvr>
-    <a:masterClrMapping/>
-  </p:clrMapOvr>
-</p:sld>
-</file>
-
-<file path=ppt/slides/slide43.xml><?xml version="1.0" encoding="utf-8"?>
-<p:sld xmlns:a="http://schemas.openxmlformats.org/drawingml/2006/main" xmlns:r="http://schemas.openxmlformats.org/officeDocument/2006/relationships" xmlns:p="http://schemas.openxmlformats.org/presentationml/2006/main">
-  <p:cSld>
-    <p:spTree>
-      <p:nvGrpSpPr>
-        <p:cNvPr id="1" name=""/>
-        <p:cNvGrpSpPr/>
-        <p:nvPr/>
-      </p:nvGrpSpPr>
-      <p:grpSpPr>
-        <a:xfrm>
-          <a:off x="0" y="0"/>
-          <a:ext cx="0" cy="0"/>
-          <a:chOff x="0" y="0"/>
-          <a:chExt cx="0" cy="0"/>
-        </a:xfrm>
-      </p:grpSpPr>
-      <p:sp>
-        <p:nvSpPr>
-          <p:cNvPr id="2" name="Title 1">
-            <a:extLst>
-              <a:ext uri="{FF2B5EF4-FFF2-40B4-BE49-F238E27FC236}">
-                <a16:creationId xmlns:a16="http://schemas.microsoft.com/office/drawing/2014/main" id="{F76A21A0-BB46-4705-8F46-89738D9DBFDC}"/>
-              </a:ext>
-            </a:extLst>
-          </p:cNvPr>
-          <p:cNvSpPr>
-            <a:spLocks noGrp="1"/>
-          </p:cNvSpPr>
-          <p:nvPr>
-            <p:ph type="title"/>
-          </p:nvPr>
-        </p:nvSpPr>
-        <p:spPr/>
-        <p:txBody>
-          <a:bodyPr/>
-          <a:lstStyle/>
-          <a:p>
-            <a:r>
-              <a:rPr lang="en-US" dirty="0"/>
-              <a:t>The Demonstration</a:t>
-            </a:r>
-          </a:p>
-        </p:txBody>
-      </p:sp>
-      <p:pic>
-        <p:nvPicPr>
-          <p:cNvPr id="17410" name="Picture 2" descr="Image result for students exam">
-            <a:extLst>
-              <a:ext uri="{FF2B5EF4-FFF2-40B4-BE49-F238E27FC236}">
-                <a16:creationId xmlns:a16="http://schemas.microsoft.com/office/drawing/2014/main" id="{C9F023E6-C609-4622-8476-D7B6D30159DC}"/>
-              </a:ext>
-            </a:extLst>
-          </p:cNvPr>
-          <p:cNvPicPr>
-            <a:picLocks noChangeAspect="1" noChangeArrowheads="1"/>
-          </p:cNvPicPr>
-          <p:nvPr/>
-        </p:nvPicPr>
-        <p:blipFill rotWithShape="1">
-          <a:blip r:embed="rId3">
-            <a:extLst>
-              <a:ext uri="{28A0092B-C50C-407E-A947-70E740481C1C}">
-                <a14:useLocalDpi xmlns:a14="http://schemas.microsoft.com/office/drawing/2010/main" val="0"/>
-              </a:ext>
-            </a:extLst>
-          </a:blip>
-          <a:srcRect l="16128"/>
-          <a:stretch/>
-        </p:blipFill>
-        <p:spPr bwMode="auto">
-          <a:xfrm>
-            <a:off x="978795" y="2556932"/>
-            <a:ext cx="4448086" cy="3318937"/>
-          </a:xfrm>
-          <a:prstGeom prst="rect">
-            <a:avLst/>
-          </a:prstGeom>
-          <a:noFill/>
-          <a:extLst>
-            <a:ext uri="{909E8E84-426E-40DD-AFC4-6F175D3DCCD1}">
-              <a14:hiddenFill xmlns:a14="http://schemas.microsoft.com/office/drawing/2010/main">
-                <a:solidFill>
-                  <a:srgbClr val="FFFFFF"/>
-                </a:solidFill>
-              </a14:hiddenFill>
-            </a:ext>
-          </a:extLst>
-        </p:spPr>
-      </p:pic>
-      <p:pic>
-        <p:nvPicPr>
-          <p:cNvPr id="17412" name="Picture 4" descr="Image result for girl sleeping">
-            <a:extLst>
-              <a:ext uri="{FF2B5EF4-FFF2-40B4-BE49-F238E27FC236}">
-                <a16:creationId xmlns:a16="http://schemas.microsoft.com/office/drawing/2014/main" id="{80488CED-29F8-4E10-927D-5BF745D48B11}"/>
-              </a:ext>
-            </a:extLst>
-          </p:cNvPr>
-          <p:cNvPicPr>
-            <a:picLocks noChangeAspect="1" noChangeArrowheads="1"/>
-          </p:cNvPicPr>
-          <p:nvPr/>
-        </p:nvPicPr>
-        <p:blipFill rotWithShape="1">
-          <a:blip r:embed="rId4">
-            <a:extLst>
-              <a:ext uri="{28A0092B-C50C-407E-A947-70E740481C1C}">
-                <a14:useLocalDpi xmlns:a14="http://schemas.microsoft.com/office/drawing/2010/main" val="0"/>
-              </a:ext>
-            </a:extLst>
-          </a:blip>
-          <a:srcRect r="1557"/>
-          <a:stretch/>
-        </p:blipFill>
-        <p:spPr bwMode="auto">
-          <a:xfrm>
-            <a:off x="5426881" y="2556932"/>
-            <a:ext cx="5786324" cy="3311473"/>
-          </a:xfrm>
-          <a:prstGeom prst="rect">
-            <a:avLst/>
-          </a:prstGeom>
-          <a:noFill/>
-          <a:extLst>
-            <a:ext uri="{909E8E84-426E-40DD-AFC4-6F175D3DCCD1}">
-              <a14:hiddenFill xmlns:a14="http://schemas.microsoft.com/office/drawing/2010/main">
-                <a:solidFill>
-                  <a:srgbClr val="FFFFFF"/>
-                </a:solidFill>
-              </a14:hiddenFill>
-            </a:ext>
-          </a:extLst>
-        </p:spPr>
-      </p:pic>
-    </p:spTree>
-    <p:extLst>
-      <p:ext uri="{BB962C8B-B14F-4D97-AF65-F5344CB8AC3E}">
-        <p14:creationId xmlns:p14="http://schemas.microsoft.com/office/powerpoint/2010/main" val="1300877336"/>
-      </p:ext>
-    </p:extLst>
-  </p:cSld>
-  <p:clrMapOvr>
-    <a:masterClrMapping/>
-  </p:clrMapOvr>
-</p:sld>
-</file>
-
-<file path=ppt/slides/slide44.xml><?xml version="1.0" encoding="utf-8"?>
-<p:sld xmlns:a="http://schemas.openxmlformats.org/drawingml/2006/main" xmlns:r="http://schemas.openxmlformats.org/officeDocument/2006/relationships" xmlns:p="http://schemas.openxmlformats.org/presentationml/2006/main">
-  <p:cSld>
-    <p:spTree>
-      <p:nvGrpSpPr>
-        <p:cNvPr id="1" name=""/>
-        <p:cNvGrpSpPr/>
-        <p:nvPr/>
-      </p:nvGrpSpPr>
-      <p:grpSpPr>
-        <a:xfrm>
-          <a:off x="0" y="0"/>
-          <a:ext cx="0" cy="0"/>
-          <a:chOff x="0" y="0"/>
-          <a:chExt cx="0" cy="0"/>
-        </a:xfrm>
-      </p:grpSpPr>
-      <p:sp>
-        <p:nvSpPr>
-          <p:cNvPr id="2" name="Title 1">
-            <a:extLst>
-              <a:ext uri="{FF2B5EF4-FFF2-40B4-BE49-F238E27FC236}">
-                <a16:creationId xmlns:a16="http://schemas.microsoft.com/office/drawing/2014/main" id="{F76A21A0-BB46-4705-8F46-89738D9DBFDC}"/>
-              </a:ext>
-            </a:extLst>
-          </p:cNvPr>
-          <p:cNvSpPr>
-            <a:spLocks noGrp="1"/>
-          </p:cNvSpPr>
-          <p:nvPr>
-            <p:ph type="title"/>
-          </p:nvPr>
-        </p:nvSpPr>
-        <p:spPr/>
-        <p:txBody>
-          <a:bodyPr/>
-          <a:lstStyle/>
-          <a:p>
-            <a:r>
-              <a:rPr lang="en-US" dirty="0"/>
-              <a:t>Soviet Montage, 1920s</a:t>
-            </a:r>
-          </a:p>
-        </p:txBody>
-      </p:sp>
-      <p:sp>
-        <p:nvSpPr>
-          <p:cNvPr id="3" name="Content Placeholder 2">
-            <a:extLst>
-              <a:ext uri="{FF2B5EF4-FFF2-40B4-BE49-F238E27FC236}">
-                <a16:creationId xmlns:a16="http://schemas.microsoft.com/office/drawing/2014/main" id="{DEC16AA6-B58B-4D32-9CF5-6757FC0A83C0}"/>
-              </a:ext>
-            </a:extLst>
-          </p:cNvPr>
-          <p:cNvSpPr>
-            <a:spLocks noGrp="1"/>
-          </p:cNvSpPr>
-          <p:nvPr>
-            <p:ph idx="1"/>
-          </p:nvPr>
-        </p:nvSpPr>
-        <p:spPr>
-          <a:xfrm>
-            <a:off x="5344733" y="2697162"/>
-            <a:ext cx="5551864" cy="3178706"/>
-          </a:xfrm>
-        </p:spPr>
-        <p:txBody>
-          <a:bodyPr>
-            <a:normAutofit/>
-          </a:bodyPr>
-          <a:lstStyle/>
-          <a:p>
-            <a:r>
-              <a:rPr lang="en-US" dirty="0">
-                <a:solidFill>
-                  <a:schemeClr val="tx1"/>
-                </a:solidFill>
-              </a:rPr>
-              <a:t>Developed by Soviet filmmakers - Sergei Eisenstein and Dziga Vertov.</a:t>
-            </a:r>
-          </a:p>
-          <a:p>
-            <a:r>
-              <a:rPr lang="en-US" dirty="0">
-                <a:solidFill>
-                  <a:schemeClr val="tx1"/>
-                </a:solidFill>
-              </a:rPr>
-              <a:t>The most famous sequence is the Odessa Steps from Eisenstein's Battleship Potemkin.</a:t>
-            </a:r>
-          </a:p>
-          <a:p>
-            <a:r>
-              <a:rPr lang="en-US" dirty="0">
-                <a:solidFill>
-                  <a:schemeClr val="tx1"/>
-                </a:solidFill>
-              </a:rPr>
-              <a:t>Soldiers' boots descending. A mother screaming. A pram on the steps.</a:t>
-            </a:r>
-          </a:p>
-          <a:p>
-            <a:r>
-              <a:rPr lang="en-US" dirty="0">
-                <a:solidFill>
-                  <a:schemeClr val="tx1"/>
-                </a:solidFill>
-              </a:rPr>
-              <a:t>No single shot contains the massacre. The sequence does.</a:t>
-            </a:r>
-          </a:p>
-        </p:txBody>
-      </p:sp>
-      <p:pic>
-        <p:nvPicPr>
-          <p:cNvPr id="18434" name="Picture 2" descr="Image result for battleship potemkin odessa steps">
-            <a:extLst>
-              <a:ext uri="{FF2B5EF4-FFF2-40B4-BE49-F238E27FC236}">
-                <a16:creationId xmlns:a16="http://schemas.microsoft.com/office/drawing/2014/main" id="{26E154F6-1F2D-42DB-B3EB-18A346A59BAD}"/>
-              </a:ext>
-            </a:extLst>
-          </p:cNvPr>
-          <p:cNvPicPr>
-            <a:picLocks noChangeAspect="1" noChangeArrowheads="1"/>
-          </p:cNvPicPr>
-          <p:nvPr/>
-        </p:nvPicPr>
-        <p:blipFill>
-          <a:blip r:embed="rId3">
-            <a:extLst>
-              <a:ext uri="{28A0092B-C50C-407E-A947-70E740481C1C}">
-                <a14:useLocalDpi xmlns:a14="http://schemas.microsoft.com/office/drawing/2010/main" val="0"/>
-              </a:ext>
-            </a:extLst>
-          </a:blip>
-          <a:srcRect/>
-          <a:stretch>
-            <a:fillRect/>
-          </a:stretch>
-        </p:blipFill>
-        <p:spPr bwMode="auto">
-          <a:xfrm>
-            <a:off x="1329748" y="2697162"/>
-            <a:ext cx="3810000" cy="3038475"/>
-          </a:xfrm>
-          <a:prstGeom prst="rect">
-            <a:avLst/>
-          </a:prstGeom>
-          <a:noFill/>
-          <a:extLst>
-            <a:ext uri="{909E8E84-426E-40DD-AFC4-6F175D3DCCD1}">
-              <a14:hiddenFill xmlns:a14="http://schemas.microsoft.com/office/drawing/2010/main">
-                <a:solidFill>
-                  <a:srgbClr val="FFFFFF"/>
-                </a:solidFill>
-              </a14:hiddenFill>
-            </a:ext>
-          </a:extLst>
-        </p:spPr>
-      </p:pic>
-    </p:spTree>
-    <p:extLst>
-      <p:ext uri="{BB962C8B-B14F-4D97-AF65-F5344CB8AC3E}">
-        <p14:creationId xmlns:p14="http://schemas.microsoft.com/office/powerpoint/2010/main" val="2019769116"/>
-      </p:ext>
-    </p:extLst>
-  </p:cSld>
-  <p:clrMapOvr>
-    <a:masterClrMapping/>
-  </p:clrMapOvr>
-</p:sld>
-</file>
-
-<file path=ppt/slides/slide45.xml><?xml version="1.0" encoding="utf-8"?>
-<p:sld xmlns:a="http://schemas.openxmlformats.org/drawingml/2006/main" xmlns:r="http://schemas.openxmlformats.org/officeDocument/2006/relationships" xmlns:p="http://schemas.openxmlformats.org/presentationml/2006/main">
-  <p:cSld>
-    <p:spTree>
-      <p:nvGrpSpPr>
-        <p:cNvPr id="1" name=""/>
-        <p:cNvGrpSpPr/>
-        <p:nvPr/>
-      </p:nvGrpSpPr>
-      <p:grpSpPr>
-        <a:xfrm>
-          <a:off x="0" y="0"/>
-          <a:ext cx="0" cy="0"/>
-          <a:chOff x="0" y="0"/>
-          <a:chExt cx="0" cy="0"/>
-        </a:xfrm>
-      </p:grpSpPr>
-      <p:sp>
-        <p:nvSpPr>
-          <p:cNvPr id="2" name="Title 1">
-            <a:extLst>
-              <a:ext uri="{FF2B5EF4-FFF2-40B4-BE49-F238E27FC236}">
-                <a16:creationId xmlns:a16="http://schemas.microsoft.com/office/drawing/2014/main" id="{E6EB990C-D13E-4405-AA5B-6CA2633ABDE6}"/>
-              </a:ext>
-            </a:extLst>
-          </p:cNvPr>
-          <p:cNvSpPr>
-            <a:spLocks noGrp="1"/>
-          </p:cNvSpPr>
-          <p:nvPr>
-            <p:ph type="title"/>
-          </p:nvPr>
-        </p:nvSpPr>
-        <p:spPr/>
-        <p:txBody>
-          <a:bodyPr/>
-          <a:lstStyle/>
-          <a:p>
-            <a:r>
-              <a:rPr lang="en-US" dirty="0"/>
-              <a:t>Summary and Exercise</a:t>
-            </a:r>
-          </a:p>
-        </p:txBody>
-      </p:sp>
-      <p:sp>
-        <p:nvSpPr>
-          <p:cNvPr id="3" name="Content Placeholder 2">
-            <a:extLst>
-              <a:ext uri="{FF2B5EF4-FFF2-40B4-BE49-F238E27FC236}">
-                <a16:creationId xmlns:a16="http://schemas.microsoft.com/office/drawing/2014/main" id="{BF87E536-E4A8-43C8-87C3-F1353963A890}"/>
-              </a:ext>
-            </a:extLst>
-          </p:cNvPr>
-          <p:cNvSpPr>
-            <a:spLocks noGrp="1"/>
-          </p:cNvSpPr>
-          <p:nvPr>
-            <p:ph idx="1"/>
-          </p:nvPr>
-        </p:nvSpPr>
-        <p:spPr/>
-        <p:txBody>
-          <a:bodyPr/>
-          <a:lstStyle/>
-          <a:p>
-            <a:r>
-              <a:rPr lang="en-US" dirty="0">
-                <a:solidFill>
-                  <a:schemeClr val="tx1"/>
-                </a:solidFill>
-              </a:rPr>
-              <a:t>Continuity editing joins shots together to create dynamic meaning.</a:t>
-            </a:r>
-          </a:p>
-          <a:p>
-            <a:r>
-              <a:rPr lang="en-US" dirty="0">
-                <a:solidFill>
-                  <a:schemeClr val="tx1"/>
-                </a:solidFill>
-              </a:rPr>
-              <a:t>Done well, the audience does not notice how shots of different sizes and angles were spliced.</a:t>
-            </a:r>
-          </a:p>
-          <a:p>
-            <a:r>
-              <a:rPr lang="en-US" dirty="0">
-                <a:solidFill>
-                  <a:schemeClr val="tx1"/>
-                </a:solidFill>
-              </a:rPr>
-              <a:t>They see one continuous whole of uninterrupted action.</a:t>
-            </a:r>
-          </a:p>
-          <a:p>
-            <a:r>
-              <a:rPr lang="en-US" dirty="0">
-                <a:solidFill>
-                  <a:schemeClr val="tx1"/>
-                </a:solidFill>
-              </a:rPr>
-              <a:t>That is what we mean by CONTINUITY.</a:t>
-            </a:r>
-          </a:p>
-        </p:txBody>
-      </p:sp>
-    </p:spTree>
-    <p:extLst>
-      <p:ext uri="{BB962C8B-B14F-4D97-AF65-F5344CB8AC3E}">
-        <p14:creationId xmlns:p14="http://schemas.microsoft.com/office/powerpoint/2010/main" val="2158515074"/>
-      </p:ext>
-    </p:extLst>
-  </p:cSld>
-  <p:clrMapOvr>
-    <a:masterClrMapping/>
-  </p:clrMapOvr>
-</p:sld>
-</file>
-
-<file path=ppt/slides/slide46.xml><?xml version="1.0" encoding="utf-8"?>
-<p:sld xmlns:a="http://schemas.openxmlformats.org/drawingml/2006/main" xmlns:r="http://schemas.openxmlformats.org/officeDocument/2006/relationships" xmlns:p="http://schemas.openxmlformats.org/presentationml/2006/main">
-  <p:cSld>
-    <p:spTree>
-      <p:nvGrpSpPr>
-        <p:cNvPr id="1" name=""/>
-        <p:cNvGrpSpPr/>
-        <p:nvPr/>
-      </p:nvGrpSpPr>
-      <p:grpSpPr>
-        <a:xfrm>
-          <a:off x="0" y="0"/>
-          <a:ext cx="0" cy="0"/>
-          <a:chOff x="0" y="0"/>
-          <a:chExt cx="0" cy="0"/>
-        </a:xfrm>
-      </p:grpSpPr>
-      <p:sp>
-        <p:nvSpPr>
-          <p:cNvPr id="2" name="Title 1">
-            <a:extLst>
-              <a:ext uri="{FF2B5EF4-FFF2-40B4-BE49-F238E27FC236}">
-                <a16:creationId xmlns:a16="http://schemas.microsoft.com/office/drawing/2014/main" id="{0D99D5DC-08DC-479D-813F-E55F2A1052C2}"/>
-              </a:ext>
-            </a:extLst>
-          </p:cNvPr>
-          <p:cNvSpPr>
-            <a:spLocks noGrp="1"/>
-          </p:cNvSpPr>
-          <p:nvPr>
-            <p:ph type="title"/>
-          </p:nvPr>
-        </p:nvSpPr>
-        <p:spPr/>
-        <p:txBody>
-          <a:bodyPr/>
-          <a:lstStyle/>
-          <a:p>
-            <a:r>
-              <a:rPr lang="en-US" dirty="0"/>
-              <a:t>Music Video Montage</a:t>
-            </a:r>
-          </a:p>
-        </p:txBody>
-      </p:sp>
-      <p:sp>
-        <p:nvSpPr>
-          <p:cNvPr id="3" name="Content Placeholder 2">
-            <a:extLst>
-              <a:ext uri="{FF2B5EF4-FFF2-40B4-BE49-F238E27FC236}">
-                <a16:creationId xmlns:a16="http://schemas.microsoft.com/office/drawing/2014/main" id="{7E8039CC-7267-4C89-936A-32ACBFCF38EB}"/>
-              </a:ext>
-            </a:extLst>
-          </p:cNvPr>
-          <p:cNvSpPr>
-            <a:spLocks noGrp="1"/>
-          </p:cNvSpPr>
-          <p:nvPr>
-            <p:ph idx="1"/>
-          </p:nvPr>
-        </p:nvSpPr>
-        <p:spPr>
-          <a:xfrm>
-            <a:off x="1295401" y="2556932"/>
-            <a:ext cx="6350539" cy="3318936"/>
-          </a:xfrm>
-        </p:spPr>
-        <p:txBody>
-          <a:bodyPr/>
-          <a:lstStyle/>
-          <a:p>
-            <a:r>
-              <a:rPr lang="en-US" dirty="0">
-                <a:solidFill>
-                  <a:schemeClr val="tx1"/>
-                </a:solidFill>
-              </a:rPr>
-              <a:t>Assembled around the song rather than around a story.</a:t>
-            </a:r>
-          </a:p>
-          <a:p>
-            <a:r>
-              <a:rPr lang="en-US" dirty="0">
-                <a:solidFill>
-                  <a:schemeClr val="tx1"/>
-                </a:solidFill>
-              </a:rPr>
-              <a:t>The rhythm and pacing of the cut follow the structure of the track.</a:t>
-            </a:r>
-          </a:p>
-          <a:p>
-            <a:r>
-              <a:rPr lang="en-US" dirty="0">
-                <a:solidFill>
-                  <a:schemeClr val="tx1"/>
-                </a:solidFill>
-              </a:rPr>
-              <a:t>Shots hold information relating to a single idea or theme, not a continuous action.</a:t>
-            </a:r>
-          </a:p>
-        </p:txBody>
-      </p:sp>
-    </p:spTree>
-    <p:extLst>
-      <p:ext uri="{BB962C8B-B14F-4D97-AF65-F5344CB8AC3E}">
-        <p14:creationId xmlns:p14="http://schemas.microsoft.com/office/powerpoint/2010/main" val="2904683537"/>
-      </p:ext>
-    </p:extLst>
-  </p:cSld>
-  <p:clrMapOvr>
-    <a:masterClrMapping/>
-  </p:clrMapOvr>
-</p:sld>
-</file>
-
-<file path=ppt/slides/slide47.xml><?xml version="1.0" encoding="utf-8"?>
-<p:sld xmlns:a="http://schemas.openxmlformats.org/drawingml/2006/main" xmlns:r="http://schemas.openxmlformats.org/officeDocument/2006/relationships" xmlns:p="http://schemas.openxmlformats.org/presentationml/2006/main">
-  <p:cSld>
-    <p:spTree>
-      <p:nvGrpSpPr>
-        <p:cNvPr id="1" name=""/>
-        <p:cNvGrpSpPr/>
-        <p:nvPr/>
-      </p:nvGrpSpPr>
-      <p:grpSpPr>
-        <a:xfrm>
-          <a:off x="0" y="0"/>
-          <a:ext cx="0" cy="0"/>
-          <a:chOff x="0" y="0"/>
-          <a:chExt cx="0" cy="0"/>
-        </a:xfrm>
-      </p:grpSpPr>
-      <p:sp>
-        <p:nvSpPr>
-          <p:cNvPr id="2" name="Title 1">
-            <a:extLst>
-              <a:ext uri="{FF2B5EF4-FFF2-40B4-BE49-F238E27FC236}">
-                <a16:creationId xmlns:a16="http://schemas.microsoft.com/office/drawing/2014/main" id="{0D99D5DC-08DC-479D-813F-E55F2A1052C2}"/>
-              </a:ext>
-            </a:extLst>
-          </p:cNvPr>
-          <p:cNvSpPr>
-            <a:spLocks noGrp="1"/>
-          </p:cNvSpPr>
-          <p:nvPr>
-            <p:ph type="title"/>
-          </p:nvPr>
-        </p:nvSpPr>
-        <p:spPr/>
-        <p:txBody>
-          <a:bodyPr/>
-          <a:lstStyle/>
-          <a:p>
-            <a:r>
-              <a:rPr lang="en-US" dirty="0"/>
-              <a:t>The Graphic Match</a:t>
-            </a:r>
-          </a:p>
-        </p:txBody>
-      </p:sp>
-      <p:sp>
-        <p:nvSpPr>
-          <p:cNvPr id="3" name="Content Placeholder 2">
-            <a:extLst>
-              <a:ext uri="{FF2B5EF4-FFF2-40B4-BE49-F238E27FC236}">
-                <a16:creationId xmlns:a16="http://schemas.microsoft.com/office/drawing/2014/main" id="{7E8039CC-7267-4C89-936A-32ACBFCF38EB}"/>
-              </a:ext>
-            </a:extLst>
-          </p:cNvPr>
-          <p:cNvSpPr>
-            <a:spLocks noGrp="1"/>
-          </p:cNvSpPr>
-          <p:nvPr>
-            <p:ph idx="1"/>
-          </p:nvPr>
-        </p:nvSpPr>
-        <p:spPr>
-          <a:xfrm>
-            <a:off x="1298448" y="2788920"/>
-            <a:ext cx="4846320" cy="3017520"/>
-          </a:xfrm>
-        </p:spPr>
-        <p:txBody>
-          <a:bodyPr/>
-          <a:lstStyle/>
-          <a:p>
-            <a:r>
-              <a:rPr lang="en-US" dirty="0">
-                <a:solidFill>
-                  <a:schemeClr val="tx1"/>
-                </a:solidFill>
-              </a:rPr>
-              <a:t>A shape in one shot echoed by a shape in the next.</a:t>
-            </a:r>
-          </a:p>
-          <a:p>
-            <a:r>
-              <a:rPr lang="en-US" dirty="0">
-                <a:solidFill>
-                  <a:schemeClr val="tx1"/>
-                </a:solidFill>
-              </a:rPr>
-              <a:t>2001: the bone tumbling in the air becomes a spacecraft.</a:t>
-            </a:r>
-          </a:p>
-          <a:p>
-            <a:r>
-              <a:rPr lang="en-US" dirty="0">
-                <a:solidFill>
-                  <a:schemeClr val="tx1"/>
-                </a:solidFill>
-              </a:rPr>
-              <a:t>The eye accepts the substitution before the brain catches up.</a:t>
-            </a:r>
-          </a:p>
-        </p:txBody>
-      </p:sp>
-      <p:pic>
-        <p:nvPicPr>
-          <p:cNvPr id="4" name="2001 match cut"/>
-          <p:cNvPicPr>
-            <a:picLocks noChangeAspect="1"/>
-          </p:cNvPicPr>
-          <p:nvPr/>
-        </p:nvPicPr>
-        <p:blipFill>
-          <a:blip r:embed="rId2"/>
-          <a:stretch>
-            <a:fillRect/>
-          </a:stretch>
-        </p:blipFill>
-        <p:spPr>
-          <a:xfrm>
-            <a:off x="6537960" y="3017520"/>
-            <a:ext cx="4297680" cy="2148840"/>
-          </a:xfrm>
-          <a:prstGeom prst="rect">
-            <a:avLst/>
-          </a:prstGeom>
-        </p:spPr>
-      </p:pic>
-    </p:spTree>
-    <p:extLst>
-      <p:ext uri="{BB962C8B-B14F-4D97-AF65-F5344CB8AC3E}">
-        <p14:creationId xmlns:p14="http://schemas.microsoft.com/office/powerpoint/2010/main" val="2904683537"/>
-      </p:ext>
-    </p:extLst>
-  </p:cSld>
-  <p:clrMapOvr>
-    <a:masterClrMapping/>
-  </p:clrMapOvr>
-</p:sld>
-</file>
-
-<file path=ppt/slides/slide48.xml><?xml version="1.0" encoding="utf-8"?>
-<p:sld xmlns:a="http://schemas.openxmlformats.org/drawingml/2006/main" xmlns:r="http://schemas.openxmlformats.org/officeDocument/2006/relationships" xmlns:p="http://schemas.openxmlformats.org/presentationml/2006/main">
-  <p:cSld>
-    <p:spTree>
-      <p:nvGrpSpPr>
-        <p:cNvPr id="1" name=""/>
-        <p:cNvGrpSpPr/>
-        <p:nvPr/>
-      </p:nvGrpSpPr>
-      <p:grpSpPr>
-        <a:xfrm>
-          <a:off x="0" y="0"/>
-          <a:ext cx="0" cy="0"/>
-          <a:chOff x="0" y="0"/>
-          <a:chExt cx="0" cy="0"/>
-        </a:xfrm>
-      </p:grpSpPr>
-      <p:sp>
-        <p:nvSpPr>
-          <p:cNvPr id="2" name="Title 1">
-            <a:extLst>
-              <a:ext uri="{FF2B5EF4-FFF2-40B4-BE49-F238E27FC236}">
-                <a16:creationId xmlns:a16="http://schemas.microsoft.com/office/drawing/2014/main" id="{0D99D5DC-08DC-479D-813F-E55F2A1052C2}"/>
-              </a:ext>
-            </a:extLst>
-          </p:cNvPr>
-          <p:cNvSpPr>
-            <a:spLocks noGrp="1"/>
-          </p:cNvSpPr>
-          <p:nvPr>
-            <p:ph type="title"/>
-          </p:nvPr>
-        </p:nvSpPr>
-        <p:spPr/>
-        <p:txBody>
-          <a:bodyPr/>
-          <a:lstStyle/>
-          <a:p>
-            <a:r>
-              <a:rPr lang="en-US" dirty="0"/>
-              <a:t>Contrast Across the Cut</a:t>
-            </a:r>
-          </a:p>
-        </p:txBody>
-      </p:sp>
-      <p:sp>
-        <p:nvSpPr>
-          <p:cNvPr id="3" name="Content Placeholder 2">
-            <a:extLst>
-              <a:ext uri="{FF2B5EF4-FFF2-40B4-BE49-F238E27FC236}">
-                <a16:creationId xmlns:a16="http://schemas.microsoft.com/office/drawing/2014/main" id="{7E8039CC-7267-4C89-936A-32ACBFCF38EB}"/>
-              </a:ext>
-            </a:extLst>
-          </p:cNvPr>
-          <p:cNvSpPr>
-            <a:spLocks noGrp="1"/>
-          </p:cNvSpPr>
-          <p:nvPr>
-            <p:ph idx="1"/>
-          </p:nvPr>
-        </p:nvSpPr>
-        <p:spPr>
-          <a:xfrm>
-            <a:off x="1295401" y="2556932"/>
-            <a:ext cx="6350539" cy="3318936"/>
-          </a:xfrm>
-        </p:spPr>
-        <p:txBody>
-          <a:bodyPr/>
-          <a:lstStyle/>
-          <a:p>
-            <a:r>
-              <a:rPr lang="en-US" dirty="0">
-                <a:solidFill>
-                  <a:schemeClr val="tx1"/>
-                </a:solidFill>
-              </a:rPr>
-              <a:t>Wide to close. Light to dark. Empty to full.</a:t>
-            </a:r>
-          </a:p>
-          <a:p>
-            <a:r>
-              <a:rPr lang="en-US" dirty="0">
-                <a:solidFill>
-                  <a:schemeClr val="tx1"/>
-                </a:solidFill>
-              </a:rPr>
-              <a:t>If two consecutive panels have the same composition, the cut is invisible in the bad way.</a:t>
-            </a:r>
-          </a:p>
-          <a:p>
-            <a:r>
-              <a:rPr lang="en-US" dirty="0">
-                <a:solidFill>
-                  <a:schemeClr val="tx1"/>
-                </a:solidFill>
-              </a:rPr>
-              <a:t>Change something deliberately, or the audience registers a stutter rather than a cut.</a:t>
-            </a:r>
-          </a:p>
-        </p:txBody>
-      </p:sp>
-    </p:spTree>
-    <p:extLst>
-      <p:ext uri="{BB962C8B-B14F-4D97-AF65-F5344CB8AC3E}">
-        <p14:creationId xmlns:p14="http://schemas.microsoft.com/office/powerpoint/2010/main" val="2904683537"/>
-      </p:ext>
-    </p:extLst>
-  </p:cSld>
-  <p:clrMapOvr>
-    <a:masterClrMapping/>
-  </p:clrMapOvr>
-</p:sld>
-</file>
-
-<file path=ppt/slides/slide49.xml><?xml version="1.0" encoding="utf-8"?>
-<p:sld xmlns:a="http://schemas.openxmlformats.org/drawingml/2006/main" xmlns:r="http://schemas.openxmlformats.org/officeDocument/2006/relationships" xmlns:p="http://schemas.openxmlformats.org/presentationml/2006/main">
-  <p:cSld>
-    <p:spTree>
-      <p:nvGrpSpPr>
-        <p:cNvPr id="1" name=""/>
-        <p:cNvGrpSpPr/>
-        <p:nvPr/>
-      </p:nvGrpSpPr>
-      <p:grpSpPr>
-        <a:xfrm>
-          <a:off x="0" y="0"/>
-          <a:ext cx="0" cy="0"/>
-          <a:chOff x="0" y="0"/>
-          <a:chExt cx="0" cy="0"/>
-        </a:xfrm>
-      </p:grpSpPr>
-      <p:sp>
-        <p:nvSpPr>
-          <p:cNvPr id="2" name="Title 1">
-            <a:extLst>
-              <a:ext uri="{FF2B5EF4-FFF2-40B4-BE49-F238E27FC236}">
-                <a16:creationId xmlns:a16="http://schemas.microsoft.com/office/drawing/2014/main" id="{0D99D5DC-08DC-479D-813F-E55F2A1052C2}"/>
-              </a:ext>
-            </a:extLst>
-          </p:cNvPr>
-          <p:cNvSpPr>
-            <a:spLocks noGrp="1"/>
-          </p:cNvSpPr>
-          <p:nvPr>
-            <p:ph type="title"/>
-          </p:nvPr>
-        </p:nvSpPr>
-        <p:spPr/>
-        <p:txBody>
-          <a:bodyPr/>
-          <a:lstStyle/>
-          <a:p>
-            <a:r>
-              <a:rPr lang="en-US" dirty="0"/>
-              <a:t>Continuity of Position</a:t>
-            </a:r>
-          </a:p>
-        </p:txBody>
-      </p:sp>
-      <p:sp>
-        <p:nvSpPr>
-          <p:cNvPr id="3" name="Content Placeholder 2">
-            <a:extLst>
-              <a:ext uri="{FF2B5EF4-FFF2-40B4-BE49-F238E27FC236}">
-                <a16:creationId xmlns:a16="http://schemas.microsoft.com/office/drawing/2014/main" id="{7E8039CC-7267-4C89-936A-32ACBFCF38EB}"/>
-              </a:ext>
-            </a:extLst>
-          </p:cNvPr>
-          <p:cNvSpPr>
-            <a:spLocks noGrp="1"/>
-          </p:cNvSpPr>
-          <p:nvPr>
-            <p:ph idx="1"/>
-          </p:nvPr>
-        </p:nvSpPr>
-        <p:spPr>
-          <a:xfrm>
-            <a:off x="1295401" y="2556932"/>
-            <a:ext cx="6350539" cy="3318936"/>
-          </a:xfrm>
-        </p:spPr>
-        <p:txBody>
-          <a:bodyPr/>
-          <a:lstStyle/>
-          <a:p>
-            <a:r>
-              <a:rPr lang="en-US" dirty="0">
-                <a:solidFill>
-                  <a:schemeClr val="tx1"/>
-                </a:solidFill>
-              </a:rPr>
-              <a:t>The audience's eye is already somewhere when your cut lands.</a:t>
-            </a:r>
-          </a:p>
-          <a:p>
-            <a:r>
-              <a:rPr lang="en-US" dirty="0">
-                <a:solidFill>
-                  <a:schemeClr val="tx1"/>
-                </a:solidFill>
-              </a:rPr>
-              <a:t>Put the next subject there - or move it deliberately and make them travel.</a:t>
-            </a:r>
-          </a:p>
-          <a:p>
-            <a:r>
-              <a:rPr lang="en-US" dirty="0">
-                <a:solidFill>
-                  <a:schemeClr val="tx1"/>
-                </a:solidFill>
-              </a:rPr>
-              <a:t>Either is fine. Neither by accident.</a:t>
-            </a:r>
-          </a:p>
-        </p:txBody>
-      </p:sp>
-    </p:spTree>
-    <p:extLst>
-      <p:ext uri="{BB962C8B-B14F-4D97-AF65-F5344CB8AC3E}">
-        <p14:creationId xmlns:p14="http://schemas.microsoft.com/office/powerpoint/2010/main" val="2904683537"/>
-      </p:ext>
-    </p:extLst>
-  </p:cSld>
-  <p:clrMapOvr>
-    <a:masterClrMapping/>
-  </p:clrMapOvr>
-</p:sld>
-</file>
-
-<file path=ppt/slides/slide50.xml><?xml version="1.0" encoding="utf-8"?>
-<p:sld xmlns:a="http://schemas.openxmlformats.org/drawingml/2006/main" xmlns:r="http://schemas.openxmlformats.org/officeDocument/2006/relationships" xmlns:p="http://schemas.openxmlformats.org/presentationml/2006/main">
-  <p:cSld>
-    <p:spTree>
-      <p:nvGrpSpPr>
-        <p:cNvPr id="1" name=""/>
-        <p:cNvGrpSpPr/>
-        <p:nvPr/>
-      </p:nvGrpSpPr>
-      <p:grpSpPr>
-        <a:xfrm>
-          <a:off x="0" y="0"/>
-          <a:ext cx="0" cy="0"/>
-          <a:chOff x="0" y="0"/>
-          <a:chExt cx="0" cy="0"/>
-        </a:xfrm>
-      </p:grpSpPr>
-      <p:sp>
-        <p:nvSpPr>
-          <p:cNvPr id="2" name="Title 1">
-            <a:extLst>
-              <a:ext uri="{FF2B5EF4-FFF2-40B4-BE49-F238E27FC236}">
-                <a16:creationId xmlns:a16="http://schemas.microsoft.com/office/drawing/2014/main" id="{0D99D5DC-08DC-479D-813F-E55F2A1052C2}"/>
-              </a:ext>
-            </a:extLst>
-          </p:cNvPr>
-          <p:cNvSpPr>
-            <a:spLocks noGrp="1"/>
-          </p:cNvSpPr>
-          <p:nvPr>
-            <p:ph type="title"/>
-          </p:nvPr>
-        </p:nvSpPr>
-        <p:spPr/>
-        <p:txBody>
-          <a:bodyPr/>
-          <a:lstStyle/>
-          <a:p>
-            <a:r>
-              <a:rPr lang="en-US" dirty="0"/>
-              <a:t>Motif and Visual Echo</a:t>
-            </a:r>
-          </a:p>
-        </p:txBody>
-      </p:sp>
-      <p:sp>
-        <p:nvSpPr>
-          <p:cNvPr id="3" name="Content Placeholder 2">
-            <a:extLst>
-              <a:ext uri="{FF2B5EF4-FFF2-40B4-BE49-F238E27FC236}">
-                <a16:creationId xmlns:a16="http://schemas.microsoft.com/office/drawing/2014/main" id="{7E8039CC-7267-4C89-936A-32ACBFCF38EB}"/>
-              </a:ext>
-            </a:extLst>
-          </p:cNvPr>
-          <p:cNvSpPr>
-            <a:spLocks noGrp="1"/>
-          </p:cNvSpPr>
-          <p:nvPr>
-            <p:ph idx="1"/>
-          </p:nvPr>
-        </p:nvSpPr>
-        <p:spPr>
-          <a:xfrm>
-            <a:off x="1295401" y="2556932"/>
-            <a:ext cx="6350539" cy="3318936"/>
-          </a:xfrm>
-        </p:spPr>
-        <p:txBody>
-          <a:bodyPr/>
-          <a:lstStyle/>
-          <a:p>
-            <a:r>
-              <a:rPr lang="en-US" dirty="0">
-                <a:solidFill>
-                  <a:schemeClr val="tx1"/>
-                </a:solidFill>
-              </a:rPr>
-              <a:t>Repeating a composition so that its return means something.</a:t>
-            </a:r>
-          </a:p>
-          <a:p>
-            <a:r>
-              <a:rPr lang="en-US" dirty="0">
-                <a:solidFill>
-                  <a:schemeClr val="tx1"/>
-                </a:solidFill>
-              </a:rPr>
-              <a:t>Same frame, changed meaning.</a:t>
-            </a:r>
-          </a:p>
-          <a:p>
-            <a:r>
-              <a:rPr lang="en-US" dirty="0">
-                <a:solidFill>
-                  <a:schemeClr val="tx1"/>
-                </a:solidFill>
-              </a:rPr>
-              <a:t>The most satisfying tool in visual storytelling, and it costs nothing but planning.</a:t>
-            </a:r>
-          </a:p>
-        </p:txBody>
-      </p:sp>
-    </p:spTree>
-    <p:extLst>
-      <p:ext uri="{BB962C8B-B14F-4D97-AF65-F5344CB8AC3E}">
-        <p14:creationId xmlns:p14="http://schemas.microsoft.com/office/powerpoint/2010/main" val="2904683537"/>
-      </p:ext>
-    </p:extLst>
-  </p:cSld>
-  <p:clrMapOvr>
-    <a:masterClrMapping/>
-  </p:clrMapOvr>
-</p:sld>
-</file>
-
-<file path=ppt/slides/slide7.xml><?xml version="1.0" encoding="utf-8"?>
-<p:sld xmlns:a="http://schemas.openxmlformats.org/drawingml/2006/main" xmlns:r="http://schemas.openxmlformats.org/officeDocument/2006/relationships" xmlns:p="http://schemas.openxmlformats.org/presentationml/2006/main">
-  <p:cSld>
-    <p:spTree>
-      <p:nvGrpSpPr>
-        <p:cNvPr id="1" name=""/>
-        <p:cNvGrpSpPr/>
-        <p:nvPr/>
-      </p:nvGrpSpPr>
-      <p:grpSpPr>
-        <a:xfrm>
-          <a:off x="0" y="0"/>
-          <a:ext cx="0" cy="0"/>
-          <a:chOff x="0" y="0"/>
-          <a:chExt cx="0" cy="0"/>
-        </a:xfrm>
-      </p:grpSpPr>
-      <p:sp>
-        <p:nvSpPr>
-          <p:cNvPr id="2" name="Title 1"/>
-          <p:cNvSpPr>
-            <a:spLocks noGrp="1"/>
-          </p:cNvSpPr>
-          <p:nvPr>
-            <p:ph type="title"/>
-          </p:nvPr>
-        </p:nvSpPr>
-        <p:spPr/>
-        <p:txBody>
-          <a:bodyPr/>
-          <a:lstStyle/>
-          <a:p>
-            <a:r>
-              <a:rPr lang="en-US" sz="4400" dirty="0"/>
-              <a:t>What You Actually Control</a:t>
-            </a:r>
-          </a:p>
-        </p:txBody>
-      </p:sp>
-      <p:sp>
-        <p:nvSpPr>
-          <p:cNvPr id="3" name="Content Placeholder 2">
-            <a:extLst>
-              <a:ext uri="{FF2B5EF4-FFF2-40B4-BE49-F238E27FC236}">
-                <a16:creationId xmlns:a16="http://schemas.microsoft.com/office/drawing/2014/main" id="{1110D695-9451-4367-A285-C8085EAF9D2D}"/>
-              </a:ext>
-            </a:extLst>
-          </p:cNvPr>
-          <p:cNvSpPr>
-            <a:spLocks noGrp="1"/>
-          </p:cNvSpPr>
-          <p:nvPr>
-            <p:ph idx="1"/>
-          </p:nvPr>
-        </p:nvSpPr>
-        <p:spPr>
-          <a:xfrm>
-            <a:off x="1295401" y="2556932"/>
-            <a:ext cx="6661825" cy="3318936"/>
-          </a:xfrm>
-        </p:spPr>
-        <p:txBody>
-          <a:bodyPr/>
-          <a:lstStyle/>
-          <a:p>
-            <a:r>
-              <a:rPr lang="en-US" dirty="0">
-                <a:solidFill>
-                  <a:schemeClr val="tx1"/>
-                </a:solidFill>
-              </a:rPr>
-              <a:t>Continuity editing compresses or stretches time, depending on what the narrative needs.</a:t>
-            </a:r>
-          </a:p>
-          <a:p>
-            <a:r>
-              <a:rPr lang="en-US" dirty="0">
-                <a:solidFill>
-                  <a:schemeClr val="tx1"/>
-                </a:solidFill>
-              </a:rPr>
-              <a:t>It links the action of an individual shot to the bigger picture of the story.</a:t>
-            </a:r>
-          </a:p>
-          <a:p>
-            <a:r>
-              <a:rPr lang="en-US" dirty="0">
-                <a:solidFill>
-                  <a:schemeClr val="tx1"/>
-                </a:solidFill>
-              </a:rPr>
-              <a:t>If it works, the audience never sees the manipulation - they see one continuous whole.</a:t>
-            </a:r>
-          </a:p>
-        </p:txBody>
-      </p:sp>
-    </p:spTree>
-    <p:extLst>
-      <p:ext uri="{BB962C8B-B14F-4D97-AF65-F5344CB8AC3E}">
-        <p14:creationId xmlns:p14="http://schemas.microsoft.com/office/powerpoint/2010/main" val="4014882690"/>
       </p:ext>
     </p:extLst>
   </p:cSld>
